--- a/docs/competition/答辩PPT-GiftWise.pptx
+++ b/docs/competition/答辩PPT-GiftWise.pptx
@@ -509,7 +509,7 @@
           <a:lstStyle/>
           <a:p>
             <a:r>
-              <a:t>GiftWise 解决的是青年送礼时的决策困难：不是缺点子，而是缺依据、怕送错、拿不准分寸。我们的产品关系优先级里，恋人和追求对象最高。做出来的真实成果是：一套独立于模型的确定性校验器、三个层级的测试真实通过、一个本地可运行的校验 API，以及真实 Dify 沙箱里跑通的 Code 节点。需要先讲清楚：完整业务工作流和模型调用还没有实现，后面我会明确列出。</a:t>
+              <a:t>GiftWise 解决的是青年送礼时的决策困难：不是缺点子，而是缺依据、怕送错、拿不准分寸。可以做已实测声明的有七项：本机探针与单元测试、Dify 工作流真实运行 10 次模型调用 34,127 tokens、真实延迟、本机 Docker 实测九项全通过、容器校验结果与本机逐字节一致、镜像无密钥且非 root 运行、以及接入层的语义一致性与 HTTP 冒烟。必须写未完成的有十七项，我按云与编排、Dify、数据与成本、可观测性与工程四组列出，一条都不省略，第 8 页是完整清单。</a:t>
             </a:r>
           </a:p>
         </p:txBody>
@@ -579,7 +579,7 @@
           <a:lstStyle/>
           <a:p>
             <a:r>
-              <a:t>痛点里最核心的是分寸：给追求对象送礼，表达太强会造成压力，太弱又显得敷衍，而这恰恰是模型最容易搞错的地方。所以我们把成功标准定成可验证的九条，而不是「体验好」。目前规则层和模拟层已经满足其中四条，涉及真实模型与页面验收的部分还没做到。</a:t>
+              <a:t>最核心的痛点是分寸：给追求对象送礼，表达太强会造成压力，太弱又显得敷衍。我们把成功标准定成可验证的九条。其中四条已有真实运行证据，其余属于未完成，包括呈现阶段、页面验收和用户测量。</a:t>
             </a:r>
           </a:p>
         </p:txBody>
@@ -649,7 +649,7 @@
           <a:lstStyle/>
           <a:p>
             <a:r>
-              <a:t>我们的核心判断是：模型可以给建议，但不能给自己打分。所以预算、禁忌、时间这些硬约束全部交给独立的 Python 代码，而且这份规则只有一份真源，同时喂给 Dify 的 Code 节点和本地 API。第二个决定是让用户在中途做选择，选完才生成包装和贺卡。第三个是把可信状态放在服务端。反过来，我们没有上微服务和 K8s，因为目前没有任何负载数据支持那种复杂度。</a:t>
+              <a:t>核心判断是：模型可以给建议，但不能给自己打分，所以硬约束全部交给独立 Python 代码，这份规则只有一份真源，同时喂给 Dify 的 Code 节点、本地 API 和容器。第二个决定是让用户在中途做选择。第三个是把可信状态放在服务端。容器我们只做了本机实测与可复现打包，明确没有上云、没有 K8s，本机容器数据是单机基线，不是生产容量结论。</a:t>
             </a:r>
           </a:p>
         </p:txBody>
@@ -719,7 +719,7 @@
           <a:lstStyle/>
           <a:p>
             <a:r>
-              <a:t>左半部分是 Agent 链路：生成、独立校验、分支、最多一次修订、重检、报告，然后在用户选择之后进入四段呈现。右半部分是架构：同一份 Python 规则同时供 Dify Code 节点和 deploy 的 API 使用。请特别注意这张图的图例：实线是我们已经实现和核实过的，虚线是目标设计。也就是说，链路上真正在真实 Dify 沙箱里跑过的只有 Code 校验节点，整个 N1 到 N7 还没有接线，草稿也没有发布。</a:t>
+              <a:t>左半部分是 Agent 链路，共 11 个节点 11 条边，已接线并在真实模型下跑通。右半部分是架构：同一份 Python 规则同时供 Dify Code 节点、本地 API 和容器使用。图例里实线是已实现和核实过的，虚线是目标设计。真实运行中 N4 的 ELSE 分支从未被触发，自然触发超预算和标签级禁忌也都没有出现；平台级 trace 不可用；草稿没有发布，也没有上云、没有推镜像仓库。</a:t>
             </a:r>
           </a:p>
         </p:txBody>
@@ -789,7 +789,7 @@
           <a:lstStyle/>
           <a:p>
             <a:r>
-              <a:t>这一页分成两栏，左边是我们真正跑出来的证据，右边是我们还没有做到的。已核实的是三个测试套件的真实数字、真实 Dify 沙箱里 Code 节点的成功执行且零 Token、本地校验 API 的运行，以及两类失败路径不会伪装成通过。没有做到的是：完整工作流没接线、模型一次都没调用过、没有任何真实商品数据、云端没有部署。这些数字全部可以在仓库里复现。</a:t>
+              <a:t>这一页只放已有真实证据，按 PM 的 A 组七条口径逐条列出并给出证据位置，全部可以在仓库里复核。另外两条是我自己另行核实、同样真实可复现的：阶段 C 独立套件 39 项通过，以及追求对象与恋人的文案差异。未完成的十七条我不在这一页展开，完整清单在第 8 页。</a:t>
             </a:r>
           </a:p>
         </p:txBody>
@@ -859,7 +859,7 @@
           <a:lstStyle/>
           <a:p>
             <a:r>
-              <a:t>工程化上有两点值得说。第一是复现：我们整个项目没有第三方依赖，Python 只用标准库，前端只用 Node 内置模块，评委拿到的仓库直接就能跑，而且生成物带哈希清单，健康检查会返回规则源码的哈希，可以确认现场跑的就是提交的那一版。第二是异常处理：模型输出的 JSON 坏掉、超预算、禁忌、未选择就请求呈现，这些路径我们都实测过，原则是失败就是失败，不会伪装成通过。同时我也要说明一个缺口：Dify 租户没有开启 trace 采集，所以我们拿不到平台级的调用轨迹。</a:t>
+              <a:t>工程化三点。第一复现：没有第三方依赖，生成物带哈希，健康检查返回规则源码哈希，容器里的校验结果与本机逐字节一致，镜像里无密钥且以非 root 运行。第二异常处理：模型输出损坏 JSON 和持续失败都有真实运行证据，原则是失败就是失败；但提示词修复之后的修订路径还没有运行时证据。第三可观测性：token 从服务端 total_tokens 采集，接入层语义一致性与 HTTP 冒烟都通过了；但平台级 trace 不可用，阶段 14 采集仍是设计，前端没有性能数据也没有在真实浏览器验证，parity 只是样例级等价且没有安全专项测试，提交也还是临时提交。</a:t>
             </a:r>
           </a:p>
         </p:txBody>
@@ -929,7 +929,7 @@
           <a:lstStyle/>
           <a:p>
             <a:r>
-              <a:t>成本这一页我尽量只讲有数据支撑的：模型调用是零次，token 是零，因为供应商还没有授权。业务延迟和调用成本我们没有实测数据，所以记成「未测量」，而不是填零。结构上我们做了省钱的设计：规则不花 token，选之前不生成三份详细方案，修订全局只有一次。真正的瓶颈会是模型质量和延迟，不是规则层。</a:t>
+              <a:t>成本这一页只用真实数字：真实模型调用 10 次、34,127 tokens，token 取服务端 total_tokens；N2 约 4.5 到 6 秒，N5 约 3 秒，端到端 5.2 到 8.9 秒；无模型的服务端 0.587 到 0.888 秒；代码节点 0.067 到 0.238 秒；本机容器镜像 178MB、冷构建 2.2 秒、热构建 0.6 秒、启动到健康 0.75 到 1.01 秒、内存 14.41 到 17.86 MiB、CPU 0.01%。请特别注意：本机容器数据是单机基线，不是生产容量结论。DeepSeek 的单位价格和单任务金额成本我写的是未核实，因为必须来自真实账单，我不会用估算值冒充。云端资源消耗和跨机延迟未测量。</a:t>
             </a:r>
           </a:p>
         </p:txBody>
@@ -999,7 +999,7 @@
           <a:lstStyle/>
           <a:p>
             <a:r>
-              <a:t>总结一下：我们完成了需求与契约冻结、确定性校验器和三层真实测试，也在真实 Dify 沙箱里验证了规则可以跑在云端，并且做到了失败不伪装成功。没有完成的是最关键的最后一公里：模型还没授权，所以真实生成和修订一次都没跑过；工作流没有接线；前端还没验收；也没有真实商品数据。下一步最优先的就是拿到模型授权，把真实的三候选和一次修订跑出来。</a:t>
+              <a:t>最后一页两栏口径固定。左边是可作为已实测列出的七条，每条都有原始证据可复核。右边是必须写进明确未完成的十七条，我按云与编排、Dify 工作流、数据与成本、可观测性与工程四组逐条列出，一条都不省略：未上云未采购、上传脚本从未上传、未推镜像仓库、无 K8S 无多副本无弹性伸缩无资源调度无分布式状态；工作流未发布未创建版本、trace 不可用、N4 ELSE 未触发、无自然 OVER_BUDGET 与 FORBIDDEN_TAG 证据、提示词修复后的修订路径无运行时证据、Dify 侧呈现阶段未实现；价格库存未核实、单价未从真实账单核实、云端资源与跨机延迟未测量；阶段 14 仍是设计、前端无性能数据未在真实浏览器验证、parity 仅样例级且无安全专项测试、提交为临时提交未独立评审。如果被问到能不能上云，标准回答是：能部署、脚本与设计已写好，但按比赛边界未采购、未上传。</a:t>
             </a:r>
           </a:p>
         </p:txBody>
@@ -4056,8 +4056,8 @@
         </p:nvSpPr>
         <p:spPr>
           <a:xfrm>
-            <a:off x="502920" y="274320"/>
-            <a:ext cx="11155680" cy="658368"/>
+            <a:off x="502920" y="219456"/>
+            <a:ext cx="11201400" cy="603504"/>
           </a:xfrm>
           <a:prstGeom prst="rect">
             <a:avLst/>
@@ -4071,7 +4071,7 @@
           <a:lstStyle/>
           <a:p>
             <a:r>
-              <a:rPr sz="2500" b="1">
+              <a:rPr sz="2400" b="1">
                 <a:solidFill>
                   <a:srgbClr val="1A202C"/>
                 </a:solidFill>
@@ -4089,8 +4089,8 @@
         </p:nvSpPr>
         <p:spPr>
           <a:xfrm>
-            <a:off x="521207" y="896112"/>
-            <a:ext cx="11155680" cy="329184"/>
+            <a:off x="521207" y="822960"/>
+            <a:ext cx="11201400" cy="365760"/>
           </a:xfrm>
           <a:prstGeom prst="rect">
             <a:avLst/>
@@ -4104,7 +4104,7 @@
           <a:lstStyle/>
           <a:p>
             <a:r>
-              <a:rPr sz="1300">
+              <a:rPr sz="1200">
                 <a:solidFill>
                   <a:srgbClr val="606B7C"/>
                 </a:solidFill>
@@ -4122,8 +4122,8 @@
         </p:nvSpPr>
         <p:spPr>
           <a:xfrm>
-            <a:off x="502920" y="1298448"/>
-            <a:ext cx="11155680" cy="1371600"/>
+            <a:off x="502920" y="1243584"/>
+            <a:ext cx="11201400" cy="1234440"/>
           </a:xfrm>
           <a:prstGeom prst="rect">
             <a:avLst/>
@@ -4190,8 +4190,8 @@
         </p:nvSpPr>
         <p:spPr>
           <a:xfrm>
-            <a:off x="502920" y="2761488"/>
-            <a:ext cx="5440680" cy="3200400"/>
+            <a:off x="502920" y="2578608"/>
+            <a:ext cx="5486400" cy="3401568"/>
           </a:xfrm>
           <a:prstGeom prst="rect">
             <a:avLst/>
@@ -4220,7 +4220,7 @@
           </a:fontRef>
         </p:style>
         <p:txBody>
-          <a:bodyPr rtlCol="0" anchor="ctr" wrap="square" lIns="109728" tIns="73152"/>
+          <a:bodyPr rtlCol="0" anchor="ctr" wrap="square" lIns="100584" rIns="82296" tIns="54864"/>
           <a:lstStyle/>
           <a:p>
             <a:pPr algn="ctr"/>
@@ -4230,82 +4230,112 @@
                   <a:srgbClr val="0E7C4F"/>
                 </a:solidFill>
               </a:rPr>
-              <a:t>E 已做出（有真实证据）</a:t>
+              <a:t>A. 可写「已实测」（有原始证据，可复核）</a:t>
             </a:r>
           </a:p>
           <a:p>
             <a:pPr>
               <a:spcAft>
-                <a:spcPts val="300"/>
-              </a:spcAft>
-            </a:pPr>
-            <a:r>
-              <a:rPr sz="1200">
-                <a:solidFill>
-                  <a:srgbClr val="1A202C"/>
-                </a:solidFill>
-              </a:rPr>
-              <a:t>确定性规则校验器（纯 Python 标准库）</a:t>
+                <a:spcPts val="100"/>
+              </a:spcAft>
+            </a:pPr>
+            <a:r>
+              <a:rPr sz="1000">
+                <a:solidFill>
+                  <a:srgbClr val="1A202C"/>
+                </a:solidFill>
+              </a:rPr>
+              <a:t>46 条本机探针 + 322 条单元测试通过</a:t>
             </a:r>
           </a:p>
           <a:p>
             <a:pPr>
               <a:spcAft>
-                <a:spcPts val="300"/>
-              </a:spcAft>
-            </a:pPr>
-            <a:r>
-              <a:rPr sz="1200">
-                <a:solidFill>
-                  <a:srgbClr val="1A202C"/>
-                </a:solidFill>
-              </a:rPr>
-              <a:t>46 项探针 / 322 项单测 / 39 项阶段 C 全部通过</a:t>
+                <a:spcPts val="100"/>
+              </a:spcAft>
+            </a:pPr>
+            <a:r>
+              <a:rPr sz="1000">
+                <a:solidFill>
+                  <a:srgbClr val="1A202C"/>
+                </a:solidFill>
+              </a:rPr>
+              <a:t>Dify 工作流真实运行 10 次模型调用 / 34,127 tokens</a:t>
             </a:r>
           </a:p>
           <a:p>
             <a:pPr>
               <a:spcAft>
-                <a:spcPts val="300"/>
-              </a:spcAft>
-            </a:pPr>
-            <a:r>
-              <a:rPr sz="1200">
-                <a:solidFill>
-                  <a:srgbClr val="1A202C"/>
-                </a:solidFill>
-              </a:rPr>
-              <a:t>真实 Dify Cloud 沙箱 Code 节点执行成功，0 Tokens</a:t>
+                <a:spcPts val="100"/>
+              </a:spcAft>
+            </a:pPr>
+            <a:r>
+              <a:rPr sz="1000">
+                <a:solidFill>
+                  <a:srgbClr val="1A202C"/>
+                </a:solidFill>
+              </a:rPr>
+              <a:t>N2 约 6.0 s；服务端 0.587–0.888 s；代码节点 0.067–0.238 s</a:t>
             </a:r>
           </a:p>
           <a:p>
             <a:pPr>
               <a:spcAft>
-                <a:spcPts val="300"/>
-              </a:spcAft>
-            </a:pPr>
-            <a:r>
-              <a:rPr sz="1200">
-                <a:solidFill>
-                  <a:srgbClr val="1A202C"/>
-                </a:solidFill>
-              </a:rPr>
-              <a:t>deploy/server.py 本地可运行的校验 API</a:t>
+                <a:spcPts val="100"/>
+              </a:spcAft>
+            </a:pPr>
+            <a:r>
+              <a:rPr sz="1000">
+                <a:solidFill>
+                  <a:srgbClr val="1A202C"/>
+                </a:solidFill>
+              </a:rPr>
+              <a:t>本机 Docker 实测 9/9：镜像 178 MB、热构建 0.6 s、启动到健康 0.75–1.01 s、内存 14.41–17.86 MiB、CPU 0.01%</a:t>
             </a:r>
           </a:p>
           <a:p>
             <a:pPr>
               <a:spcAft>
-                <a:spcPts val="300"/>
-              </a:spcAft>
-            </a:pPr>
-            <a:r>
-              <a:rPr sz="1200">
-                <a:solidFill>
-                  <a:srgbClr val="1A202C"/>
-                </a:solidFill>
-              </a:rPr>
-              <a:t>中文接入层页面可运行（模拟数据，明确标注）</a:t>
+                <a:spcPts val="100"/>
+              </a:spcAft>
+            </a:pPr>
+            <a:r>
+              <a:rPr sz="1000">
+                <a:solidFill>
+                  <a:srgbClr val="1A202C"/>
+                </a:solidFill>
+              </a:rPr>
+              <a:t>容器 /validate 与本机 validator.rules.validate 逐字节一致</a:t>
+            </a:r>
+          </a:p>
+          <a:p>
+            <a:pPr>
+              <a:spcAft>
+                <a:spcPts val="100"/>
+              </a:spcAft>
+            </a:pPr>
+            <a:r>
+              <a:rPr sz="1000">
+                <a:solidFill>
+                  <a:srgbClr val="1A202C"/>
+                </a:solidFill>
+              </a:rPr>
+              <a:t>镜像内无密钥、非 root（uid 10001）运行</a:t>
+            </a:r>
+          </a:p>
+          <a:p>
+            <a:pPr>
+              <a:spcAft>
+                <a:spcPts val="100"/>
+              </a:spcAft>
+            </a:pPr>
+            <a:r>
+              <a:rPr sz="1000">
+                <a:solidFill>
+                  <a:srgbClr val="1A202C"/>
+                </a:solidFill>
+              </a:rPr>
+              <a:t>接入层 JS 与 Python 规则语义一致（55 组 / 0 差异）；HTTP 冒烟 59 项 / 0 失败</a:t>
             </a:r>
           </a:p>
         </p:txBody>
@@ -4318,8 +4348,8 @@
         </p:nvSpPr>
         <p:spPr>
           <a:xfrm>
-            <a:off x="6217920" y="2761488"/>
-            <a:ext cx="5440680" cy="3200400"/>
+            <a:off x="6217920" y="2578608"/>
+            <a:ext cx="5486400" cy="3401568"/>
           </a:xfrm>
           <a:prstGeom prst="rect">
             <a:avLst/>
@@ -4348,7 +4378,7 @@
           </a:fontRef>
         </p:style>
         <p:txBody>
-          <a:bodyPr rtlCol="0" anchor="ctr" wrap="square" lIns="109728" tIns="73152"/>
+          <a:bodyPr rtlCol="0" anchor="ctr" wrap="square" lIns="100584" rIns="82296" tIns="54864"/>
           <a:lstStyle/>
           <a:p>
             <a:pPr algn="ctr"/>
@@ -4358,67 +4388,67 @@
                   <a:srgbClr val="B42828"/>
                 </a:solidFill>
               </a:rPr>
-              <a:t>P 未完成（现场如实说明）</a:t>
+              <a:t>B. 必须写「未完成」（共 17 条，见第 8 页）</a:t>
             </a:r>
           </a:p>
           <a:p>
             <a:pPr>
               <a:spcAft>
-                <a:spcPts val="300"/>
-              </a:spcAft>
-            </a:pPr>
-            <a:r>
-              <a:rPr sz="1200">
-                <a:solidFill>
-                  <a:srgbClr val="1A202C"/>
-                </a:solidFill>
-              </a:rPr>
-              <a:t>完整业务工作流未接线（草稿仅 2 节点 1 边、无结束节点）</a:t>
+                <a:spcPts val="100"/>
+              </a:spcAft>
+            </a:pPr>
+            <a:r>
+              <a:rPr sz="1000">
+                <a:solidFill>
+                  <a:srgbClr val="1A202C"/>
+                </a:solidFill>
+              </a:rPr>
+              <a:t>B1 云与编排：未上云、未采购、未上传、未推镜像仓库、无 K8S</a:t>
             </a:r>
           </a:p>
           <a:p>
             <a:pPr>
               <a:spcAft>
-                <a:spcPts val="300"/>
-              </a:spcAft>
-            </a:pPr>
-            <a:r>
-              <a:rPr sz="1200">
-                <a:solidFill>
-                  <a:srgbClr val="1A202C"/>
-                </a:solidFill>
-              </a:rPr>
-              <a:t>Dify 草稿未发布；模型调用 0 次、0 Tokens</a:t>
+                <a:spcPts val="100"/>
+              </a:spcAft>
+            </a:pPr>
+            <a:r>
+              <a:rPr sz="1000">
+                <a:solidFill>
+                  <a:srgbClr val="1A202C"/>
+                </a:solidFill>
+              </a:rPr>
+              <a:t>B2 Dify：未发布未建版本；trace 不可用；N4 ELSE 未触发；无自然 OVER_BUDGET / FORBIDDEN_TAG 证据；Dify 侧呈现阶段未实现</a:t>
             </a:r>
           </a:p>
           <a:p>
             <a:pPr>
               <a:spcAft>
-                <a:spcPts val="300"/>
-              </a:spcAft>
-            </a:pPr>
-            <a:r>
-              <a:rPr sz="1200">
-                <a:solidFill>
-                  <a:srgbClr val="1A202C"/>
-                </a:solidFill>
-              </a:rPr>
-              <a:t>无真实商品价格 / 库存 / 物流数据</a:t>
+                <a:spcPts val="100"/>
+              </a:spcAft>
+            </a:pPr>
+            <a:r>
+              <a:rPr sz="1000">
+                <a:solidFill>
+                  <a:srgbClr val="1A202C"/>
+                </a:solidFill>
+              </a:rPr>
+              <a:t>B3 数据与成本：价格库存未核实；DeepSeek 单价未从真实账单核实；云端资源与跨机延迟未测量</a:t>
             </a:r>
           </a:p>
           <a:p>
             <a:pPr>
               <a:spcAft>
-                <a:spcPts val="300"/>
-              </a:spcAft>
-            </a:pPr>
-            <a:r>
-              <a:rPr sz="1200">
-                <a:solidFill>
-                  <a:srgbClr val="1A202C"/>
-                </a:solidFill>
-              </a:rPr>
-              <a:t>前端未交付验收；云端未部署</a:t>
+                <a:spcPts val="100"/>
+              </a:spcAft>
+            </a:pPr>
+            <a:r>
+              <a:rPr sz="1000">
+                <a:solidFill>
+                  <a:srgbClr val="1A202C"/>
+                </a:solidFill>
+              </a:rPr>
+              <a:t>B4 可观测性与工程：阶段 14 仍是设计；web 无性能数据、未在真实浏览器验证；parity 仅样例级、无安全专项；提交为临时提交未独立评审</a:t>
             </a:r>
           </a:p>
         </p:txBody>
@@ -4431,8 +4461,8 @@
         </p:nvSpPr>
         <p:spPr>
           <a:xfrm>
-            <a:off x="502920" y="6419088"/>
-            <a:ext cx="11155680" cy="310896"/>
+            <a:off x="502920" y="6364224"/>
+            <a:ext cx="11201400" cy="420624"/>
           </a:xfrm>
           <a:prstGeom prst="rect">
             <a:avLst/>
@@ -4446,12 +4476,12 @@
           <a:lstStyle/>
           <a:p>
             <a:r>
-              <a:rPr sz="1000">
+              <a:rPr sz="950">
                 <a:solidFill>
                   <a:srgbClr val="606B7C"/>
                 </a:solidFill>
               </a:rPr>
-              <a:t>版本：本地 HEAD 89d6624（工作区有未提交改动）｜提交截止 2026-11-01 10:30｜汇报 5 分钟 / Demo 3 分钟 / 问答 7 分钟</a:t>
+              <a:t>版本：本地 HEAD + 工作区未提交改动（现场若使用与提交版本不同的代码/模型/配置，将主动说明，评分规则 1.4）｜截止 2026-11-01 10:30｜汇报 5 分钟 / Demo 3 分钟 / 问答 7 分钟</a:t>
             </a:r>
           </a:p>
         </p:txBody>
@@ -4525,8 +4555,8 @@
         </p:nvSpPr>
         <p:spPr>
           <a:xfrm>
-            <a:off x="502920" y="274320"/>
-            <a:ext cx="11155680" cy="658368"/>
+            <a:off x="502920" y="219456"/>
+            <a:ext cx="11201400" cy="603504"/>
           </a:xfrm>
           <a:prstGeom prst="rect">
             <a:avLst/>
@@ -4540,7 +4570,7 @@
           <a:lstStyle/>
           <a:p>
             <a:r>
-              <a:rPr sz="2500" b="1">
+              <a:rPr sz="2400" b="1">
                 <a:solidFill>
                   <a:srgbClr val="1A202C"/>
                 </a:solidFill>
@@ -4558,8 +4588,8 @@
         </p:nvSpPr>
         <p:spPr>
           <a:xfrm>
-            <a:off x="521207" y="896112"/>
-            <a:ext cx="11155680" cy="329184"/>
+            <a:off x="521207" y="822960"/>
+            <a:ext cx="11201400" cy="365760"/>
           </a:xfrm>
           <a:prstGeom prst="rect">
             <a:avLst/>
@@ -4573,7 +4603,7 @@
           <a:lstStyle/>
           <a:p>
             <a:r>
-              <a:rPr sz="1300">
+              <a:rPr sz="1200">
                 <a:solidFill>
                   <a:srgbClr val="606B7C"/>
                 </a:solidFill>
@@ -4591,8 +4621,8 @@
         </p:nvSpPr>
         <p:spPr>
           <a:xfrm>
-            <a:off x="502920" y="1298448"/>
-            <a:ext cx="11155680" cy="1234440"/>
+            <a:off x="502920" y="1243584"/>
+            <a:ext cx="11201400" cy="1170432"/>
           </a:xfrm>
           <a:prstGeom prst="rect">
             <a:avLst/>
@@ -4660,8 +4690,8 @@
           <p:nvPr/>
         </p:nvGraphicFramePr>
         <p:xfrm>
-          <a:off x="502920" y="2697480"/>
-          <a:ext cx="11155680" cy="3200400"/>
+          <a:off x="502920" y="2578608"/>
+          <a:ext cx="11201399" cy="3310128"/>
         </p:xfrm>
         <a:graphic>
           <a:graphicData uri="http://schemas.openxmlformats.org/drawingml/2006/table">
@@ -4670,18 +4700,18 @@
                 <a:tableStyleId>{5C22544A-7EE6-4342-B048-85BDC9FD1C3A}</a:tableStyleId>
               </a:tblPr>
               <a:tblGrid>
-                <a:gridCol w="914400"/>
+                <a:gridCol w="914399"/>
                 <a:gridCol w="5669280"/>
-                <a:gridCol w="4572000"/>
+                <a:gridCol w="4617720"/>
               </a:tblGrid>
-              <a:tr h="320040">
-                <a:tc>
-                  <a:txBody>
-                    <a:bodyPr wrap="square"/>
-                    <a:lstStyle/>
-                    <a:p>
-                      <a:r>
-                        <a:rPr sz="1000" b="1">
+              <a:tr h="331012">
+                <a:tc>
+                  <a:txBody>
+                    <a:bodyPr wrap="square"/>
+                    <a:lstStyle/>
+                    <a:p>
+                      <a:r>
+                        <a:rPr sz="950" b="1">
                           <a:solidFill>
                             <a:srgbClr val="FFFFFF"/>
                           </a:solidFill>
@@ -4702,7 +4732,7 @@
                     <a:lstStyle/>
                     <a:p>
                       <a:r>
-                        <a:rPr sz="1000" b="1">
+                        <a:rPr sz="950" b="1">
                           <a:solidFill>
                             <a:srgbClr val="FFFFFF"/>
                           </a:solidFill>
@@ -4723,7 +4753,7 @@
                     <a:lstStyle/>
                     <a:p>
                       <a:r>
-                        <a:rPr sz="1000" b="1">
+                        <a:rPr sz="950" b="1">
                           <a:solidFill>
                             <a:srgbClr val="FFFFFF"/>
                           </a:solidFill>
@@ -4739,14 +4769,14 @@
                   </a:tcPr>
                 </a:tc>
               </a:tr>
-              <a:tr h="320040">
-                <a:tc>
-                  <a:txBody>
-                    <a:bodyPr wrap="square"/>
-                    <a:lstStyle/>
-                    <a:p>
-                      <a:r>
-                        <a:rPr sz="1000">
+              <a:tr h="331012">
+                <a:tc>
+                  <a:txBody>
+                    <a:bodyPr wrap="square"/>
+                    <a:lstStyle/>
+                    <a:p>
+                      <a:r>
+                        <a:rPr sz="950">
                           <a:solidFill>
                             <a:srgbClr val="1A202C"/>
                           </a:solidFill>
@@ -4767,7 +4797,7 @@
                     <a:lstStyle/>
                     <a:p>
                       <a:r>
-                        <a:rPr sz="1000">
+                        <a:rPr sz="950">
                           <a:solidFill>
                             <a:srgbClr val="1A202C"/>
                           </a:solidFill>
@@ -4788,12 +4818,12 @@
                     <a:lstStyle/>
                     <a:p>
                       <a:r>
-                        <a:rPr sz="1000">
+                        <a:rPr sz="950">
                           <a:solidFill>
                             <a:srgbClr val="1A202C"/>
                           </a:solidFill>
                         </a:rPr>
-                        <a:t>P 部分（规则层已实现，页面未验收）</a:t>
+                        <a:t>B 部分（规则层已实现，页面未验收）</a:t>
                       </a:r>
                     </a:p>
                   </a:txBody>
@@ -4804,14 +4834,14 @@
                   </a:tcPr>
                 </a:tc>
               </a:tr>
-              <a:tr h="320040">
-                <a:tc>
-                  <a:txBody>
-                    <a:bodyPr wrap="square"/>
-                    <a:lstStyle/>
-                    <a:p>
-                      <a:r>
-                        <a:rPr sz="1000">
+              <a:tr h="331012">
+                <a:tc>
+                  <a:txBody>
+                    <a:bodyPr wrap="square"/>
+                    <a:lstStyle/>
+                    <a:p>
+                      <a:r>
+                        <a:rPr sz="950">
                           <a:solidFill>
                             <a:srgbClr val="1A202C"/>
                           </a:solidFill>
@@ -4832,7 +4862,7 @@
                     <a:lstStyle/>
                     <a:p>
                       <a:r>
-                        <a:rPr sz="1000">
+                        <a:rPr sz="950">
                           <a:solidFill>
                             <a:srgbClr val="1A202C"/>
                           </a:solidFill>
@@ -4853,12 +4883,12 @@
                     <a:lstStyle/>
                     <a:p>
                       <a:r>
-                        <a:rPr sz="1000">
+                        <a:rPr sz="950">
                           <a:solidFill>
                             <a:srgbClr val="1A202C"/>
                           </a:solidFill>
                         </a:rPr>
-                        <a:t>P 仅 mock 固定样例</a:t>
+                        <a:t>A 真实模型已产出三候选（R1 用例）</a:t>
                       </a:r>
                     </a:p>
                   </a:txBody>
@@ -4869,14 +4899,14 @@
                   </a:tcPr>
                 </a:tc>
               </a:tr>
-              <a:tr h="320040">
-                <a:tc>
-                  <a:txBody>
-                    <a:bodyPr wrap="square"/>
-                    <a:lstStyle/>
-                    <a:p>
-                      <a:r>
-                        <a:rPr sz="1000">
+              <a:tr h="331012">
+                <a:tc>
+                  <a:txBody>
+                    <a:bodyPr wrap="square"/>
+                    <a:lstStyle/>
+                    <a:p>
+                      <a:r>
+                        <a:rPr sz="950">
                           <a:solidFill>
                             <a:srgbClr val="1A202C"/>
                           </a:solidFill>
@@ -4897,7 +4927,7 @@
                     <a:lstStyle/>
                     <a:p>
                       <a:r>
-                        <a:rPr sz="1000">
+                        <a:rPr sz="950">
                           <a:solidFill>
                             <a:srgbClr val="1A202C"/>
                           </a:solidFill>
@@ -4918,12 +4948,12 @@
                     <a:lstStyle/>
                     <a:p>
                       <a:r>
-                        <a:rPr sz="1000">
+                        <a:rPr sz="950">
                           <a:solidFill>
                             <a:srgbClr val="1A202C"/>
                           </a:solidFill>
                         </a:rPr>
-                        <a:t>E 离线与 mock 层已实现</a:t>
+                        <a:t>A 真实 Dify 链路已实测</a:t>
                       </a:r>
                     </a:p>
                   </a:txBody>
@@ -4934,14 +4964,14 @@
                   </a:tcPr>
                 </a:tc>
               </a:tr>
-              <a:tr h="320040">
-                <a:tc>
-                  <a:txBody>
-                    <a:bodyPr wrap="square"/>
-                    <a:lstStyle/>
-                    <a:p>
-                      <a:r>
-                        <a:rPr sz="1000">
+              <a:tr h="331012">
+                <a:tc>
+                  <a:txBody>
+                    <a:bodyPr wrap="square"/>
+                    <a:lstStyle/>
+                    <a:p>
+                      <a:r>
+                        <a:rPr sz="950">
                           <a:solidFill>
                             <a:srgbClr val="1A202C"/>
                           </a:solidFill>
@@ -4962,7 +4992,7 @@
                     <a:lstStyle/>
                     <a:p>
                       <a:r>
-                        <a:rPr sz="1000">
+                        <a:rPr sz="950">
                           <a:solidFill>
                             <a:srgbClr val="1A202C"/>
                           </a:solidFill>
@@ -4983,12 +5013,12 @@
                     <a:lstStyle/>
                     <a:p>
                       <a:r>
-                        <a:rPr sz="1000">
+                        <a:rPr sz="950">
                           <a:solidFill>
                             <a:srgbClr val="1A202C"/>
                           </a:solidFill>
                         </a:rPr>
-                        <a:t>E mock 层实测差异</a:t>
+                        <a:t>B 规则与文案层实测；模型侧部分</a:t>
                       </a:r>
                     </a:p>
                   </a:txBody>
@@ -4999,14 +5029,14 @@
                   </a:tcPr>
                 </a:tc>
               </a:tr>
-              <a:tr h="320040">
-                <a:tc>
-                  <a:txBody>
-                    <a:bodyPr wrap="square"/>
-                    <a:lstStyle/>
-                    <a:p>
-                      <a:r>
-                        <a:rPr sz="1000">
+              <a:tr h="331012">
+                <a:tc>
+                  <a:txBody>
+                    <a:bodyPr wrap="square"/>
+                    <a:lstStyle/>
+                    <a:p>
+                      <a:r>
+                        <a:rPr sz="950">
                           <a:solidFill>
                             <a:srgbClr val="1A202C"/>
                           </a:solidFill>
@@ -5027,7 +5057,7 @@
                     <a:lstStyle/>
                     <a:p>
                       <a:r>
-                        <a:rPr sz="1000">
+                        <a:rPr sz="950">
                           <a:solidFill>
                             <a:srgbClr val="1A202C"/>
                           </a:solidFill>
@@ -5048,12 +5078,12 @@
                     <a:lstStyle/>
                     <a:p>
                       <a:r>
-                        <a:rPr sz="1000">
+                        <a:rPr sz="950">
                           <a:solidFill>
                             <a:srgbClr val="1A202C"/>
                           </a:solidFill>
                         </a:rPr>
-                        <a:t>E mock 层实测拒绝</a:t>
+                        <a:t>B 呈现阶段未实现（规则层已约束）</a:t>
                       </a:r>
                     </a:p>
                   </a:txBody>
@@ -5064,14 +5094,14 @@
                   </a:tcPr>
                 </a:tc>
               </a:tr>
-              <a:tr h="320040">
-                <a:tc>
-                  <a:txBody>
-                    <a:bodyPr wrap="square"/>
-                    <a:lstStyle/>
-                    <a:p>
-                      <a:r>
-                        <a:rPr sz="1000">
+              <a:tr h="331012">
+                <a:tc>
+                  <a:txBody>
+                    <a:bodyPr wrap="square"/>
+                    <a:lstStyle/>
+                    <a:p>
+                      <a:r>
+                        <a:rPr sz="950">
                           <a:solidFill>
                             <a:srgbClr val="1A202C"/>
                           </a:solidFill>
@@ -5092,7 +5122,7 @@
                     <a:lstStyle/>
                     <a:p>
                       <a:r>
-                        <a:rPr sz="1000">
+                        <a:rPr sz="950">
                           <a:solidFill>
                             <a:srgbClr val="1A202C"/>
                           </a:solidFill>
@@ -5113,12 +5143,12 @@
                     <a:lstStyle/>
                     <a:p>
                       <a:r>
-                        <a:rPr sz="1000">
+                        <a:rPr sz="950">
                           <a:solidFill>
                             <a:srgbClr val="1A202C"/>
                           </a:solidFill>
                         </a:rPr>
-                        <a:t>E mock 层实测</a:t>
+                        <a:t>B 阶段未实现（设计已冻结）</a:t>
                       </a:r>
                     </a:p>
                   </a:txBody>
@@ -5129,14 +5159,14 @@
                   </a:tcPr>
                 </a:tc>
               </a:tr>
-              <a:tr h="320040">
-                <a:tc>
-                  <a:txBody>
-                    <a:bodyPr wrap="square"/>
-                    <a:lstStyle/>
-                    <a:p>
-                      <a:r>
-                        <a:rPr sz="1000">
+              <a:tr h="331012">
+                <a:tc>
+                  <a:txBody>
+                    <a:bodyPr wrap="square"/>
+                    <a:lstStyle/>
+                    <a:p>
+                      <a:r>
+                        <a:rPr sz="950">
                           <a:solidFill>
                             <a:srgbClr val="1A202C"/>
                           </a:solidFill>
@@ -5157,7 +5187,7 @@
                     <a:lstStyle/>
                     <a:p>
                       <a:r>
-                        <a:rPr sz="1000">
+                        <a:rPr sz="950">
                           <a:solidFill>
                             <a:srgbClr val="1A202C"/>
                           </a:solidFill>
@@ -5178,12 +5208,12 @@
                     <a:lstStyle/>
                     <a:p>
                       <a:r>
-                        <a:rPr sz="1000">
+                        <a:rPr sz="950">
                           <a:solidFill>
                             <a:srgbClr val="1A202C"/>
                           </a:solidFill>
                         </a:rPr>
-                        <a:t>E 离线 / mock 层</a:t>
+                        <a:t>A 真实修订链路 repair_count=1 已实测</a:t>
                       </a:r>
                     </a:p>
                   </a:txBody>
@@ -5194,14 +5224,14 @@
                   </a:tcPr>
                 </a:tc>
               </a:tr>
-              <a:tr h="320040">
-                <a:tc>
-                  <a:txBody>
-                    <a:bodyPr wrap="square"/>
-                    <a:lstStyle/>
-                    <a:p>
-                      <a:r>
-                        <a:rPr sz="1000">
+              <a:tr h="331012">
+                <a:tc>
+                  <a:txBody>
+                    <a:bodyPr wrap="square"/>
+                    <a:lstStyle/>
+                    <a:p>
+                      <a:r>
+                        <a:rPr sz="950">
                           <a:solidFill>
                             <a:srgbClr val="1A202C"/>
                           </a:solidFill>
@@ -5222,7 +5252,7 @@
                     <a:lstStyle/>
                     <a:p>
                       <a:r>
-                        <a:rPr sz="1000">
+                        <a:rPr sz="950">
                           <a:solidFill>
                             <a:srgbClr val="1A202C"/>
                           </a:solidFill>
@@ -5243,12 +5273,12 @@
                     <a:lstStyle/>
                     <a:p>
                       <a:r>
-                        <a:rPr sz="1000">
+                        <a:rPr sz="950">
                           <a:solidFill>
                             <a:srgbClr val="1A202C"/>
                           </a:solidFill>
                         </a:rPr>
-                        <a:t>P 未逐项验收</a:t>
+                        <a:t>B 未逐项验收</a:t>
                       </a:r>
                     </a:p>
                   </a:txBody>
@@ -5259,14 +5289,14 @@
                   </a:tcPr>
                 </a:tc>
               </a:tr>
-              <a:tr h="320040">
-                <a:tc>
-                  <a:txBody>
-                    <a:bodyPr wrap="square"/>
-                    <a:lstStyle/>
-                    <a:p>
-                      <a:r>
-                        <a:rPr sz="1000">
+              <a:tr h="331020">
+                <a:tc>
+                  <a:txBody>
+                    <a:bodyPr wrap="square"/>
+                    <a:lstStyle/>
+                    <a:p>
+                      <a:r>
+                        <a:rPr sz="950">
                           <a:solidFill>
                             <a:srgbClr val="1A202C"/>
                           </a:solidFill>
@@ -5287,7 +5317,7 @@
                     <a:lstStyle/>
                     <a:p>
                       <a:r>
-                        <a:rPr sz="1000">
+                        <a:rPr sz="950">
                           <a:solidFill>
                             <a:srgbClr val="1A202C"/>
                           </a:solidFill>
@@ -5308,12 +5338,12 @@
                     <a:lstStyle/>
                     <a:p>
                       <a:r>
-                        <a:rPr sz="1000">
+                        <a:rPr sz="950">
                           <a:solidFill>
                             <a:srgbClr val="1A202C"/>
                           </a:solidFill>
                         </a:rPr>
-                        <a:t>E 超预算与损坏 JSON 实测</a:t>
+                        <a:t>A 持续失败用例 all_passed=false 已实测</a:t>
                       </a:r>
                     </a:p>
                   </a:txBody>
@@ -5336,8 +5366,8 @@
         </p:nvSpPr>
         <p:spPr>
           <a:xfrm>
-            <a:off x="502920" y="6419088"/>
-            <a:ext cx="11155680" cy="310896"/>
+            <a:off x="502920" y="6364224"/>
+            <a:ext cx="11201400" cy="420624"/>
           </a:xfrm>
           <a:prstGeom prst="rect">
             <a:avLst/>
@@ -5351,12 +5381,12 @@
           <a:lstStyle/>
           <a:p>
             <a:r>
-              <a:rPr sz="1000">
+              <a:rPr sz="950">
                 <a:solidFill>
                   <a:srgbClr val="606B7C"/>
                 </a:solidFill>
               </a:rPr>
-              <a:t>目标而非已达成：约 60 秒完成初始输入 —— 无真实用户测量。</a:t>
+              <a:t>目标而非已达成：约 60 秒完成初始输入 —— 无真实用户测量（B13 类）。</a:t>
             </a:r>
           </a:p>
         </p:txBody>
@@ -5430,8 +5460,8 @@
         </p:nvSpPr>
         <p:spPr>
           <a:xfrm>
-            <a:off x="502920" y="274320"/>
-            <a:ext cx="11155680" cy="658368"/>
+            <a:off x="502920" y="219456"/>
+            <a:ext cx="11201400" cy="603504"/>
           </a:xfrm>
           <a:prstGeom prst="rect">
             <a:avLst/>
@@ -5445,7 +5475,7 @@
           <a:lstStyle/>
           <a:p>
             <a:r>
-              <a:rPr sz="2500" b="1">
+              <a:rPr sz="2400" b="1">
                 <a:solidFill>
                   <a:srgbClr val="1A202C"/>
                 </a:solidFill>
@@ -5463,8 +5493,8 @@
         </p:nvSpPr>
         <p:spPr>
           <a:xfrm>
-            <a:off x="521207" y="896112"/>
-            <a:ext cx="11155680" cy="329184"/>
+            <a:off x="521207" y="822960"/>
+            <a:ext cx="11201400" cy="365760"/>
           </a:xfrm>
           <a:prstGeom prst="rect">
             <a:avLst/>
@@ -5478,7 +5508,7 @@
           <a:lstStyle/>
           <a:p>
             <a:r>
-              <a:rPr sz="1300">
+              <a:rPr sz="1200">
                 <a:solidFill>
                   <a:srgbClr val="606B7C"/>
                 </a:solidFill>
@@ -5496,8 +5526,8 @@
         </p:nvSpPr>
         <p:spPr>
           <a:xfrm>
-            <a:off x="502920" y="1325880"/>
-            <a:ext cx="3611880" cy="2148840"/>
+            <a:off x="502920" y="1261872"/>
+            <a:ext cx="3611880" cy="2084831"/>
           </a:xfrm>
           <a:prstGeom prst="rect">
             <a:avLst/>
@@ -5526,7 +5556,7 @@
           </a:fontRef>
         </p:style>
         <p:txBody>
-          <a:bodyPr rtlCol="0" anchor="ctr" wrap="square" lIns="109728" tIns="73152"/>
+          <a:bodyPr rtlCol="0" anchor="ctr" wrap="square" lIns="100584" rIns="82296" tIns="54864"/>
           <a:lstStyle/>
           <a:p>
             <a:pPr algn="ctr"/>
@@ -5542,11 +5572,11 @@
           <a:p>
             <a:pPr>
               <a:spcAft>
-                <a:spcPts val="300"/>
-              </a:spcAft>
-            </a:pPr>
-            <a:r>
-              <a:rPr sz="1150">
+                <a:spcPts val="100"/>
+              </a:spcAft>
+            </a:pPr>
+            <a:r>
+              <a:rPr sz="1100">
                 <a:solidFill>
                   <a:srgbClr val="1A202C"/>
                 </a:solidFill>
@@ -5557,11 +5587,11 @@
           <a:p>
             <a:pPr>
               <a:spcAft>
-                <a:spcPts val="300"/>
-              </a:spcAft>
-            </a:pPr>
-            <a:r>
-              <a:rPr sz="1150">
+                <a:spcPts val="100"/>
+              </a:spcAft>
+            </a:pPr>
+            <a:r>
+              <a:rPr sz="1100">
                 <a:solidFill>
                   <a:srgbClr val="1A202C"/>
                 </a:solidFill>
@@ -5572,11 +5602,11 @@
           <a:p>
             <a:pPr>
               <a:spcAft>
-                <a:spcPts val="300"/>
-              </a:spcAft>
-            </a:pPr>
-            <a:r>
-              <a:rPr sz="1150">
+                <a:spcPts val="100"/>
+              </a:spcAft>
+            </a:pPr>
+            <a:r>
+              <a:rPr sz="1100">
                 <a:solidFill>
                   <a:srgbClr val="1A202C"/>
                 </a:solidFill>
@@ -5594,8 +5624,8 @@
         </p:nvSpPr>
         <p:spPr>
           <a:xfrm>
-            <a:off x="4279392" y="1325880"/>
-            <a:ext cx="3611880" cy="2148840"/>
+            <a:off x="4279392" y="1261872"/>
+            <a:ext cx="3611880" cy="2084831"/>
           </a:xfrm>
           <a:prstGeom prst="rect">
             <a:avLst/>
@@ -5624,7 +5654,7 @@
           </a:fontRef>
         </p:style>
         <p:txBody>
-          <a:bodyPr rtlCol="0" anchor="ctr" wrap="square" lIns="109728" tIns="73152"/>
+          <a:bodyPr rtlCol="0" anchor="ctr" wrap="square" lIns="100584" rIns="82296" tIns="54864"/>
           <a:lstStyle/>
           <a:p>
             <a:pPr algn="ctr"/>
@@ -5640,11 +5670,11 @@
           <a:p>
             <a:pPr>
               <a:spcAft>
-                <a:spcPts val="300"/>
-              </a:spcAft>
-            </a:pPr>
-            <a:r>
-              <a:rPr sz="1150">
+                <a:spcPts val="100"/>
+              </a:spcAft>
+            </a:pPr>
+            <a:r>
+              <a:rPr sz="1100">
                 <a:solidFill>
                   <a:srgbClr val="1A202C"/>
                 </a:solidFill>
@@ -5655,11 +5685,11 @@
           <a:p>
             <a:pPr>
               <a:spcAft>
-                <a:spcPts val="300"/>
-              </a:spcAft>
-            </a:pPr>
-            <a:r>
-              <a:rPr sz="1150">
+                <a:spcPts val="100"/>
+              </a:spcAft>
+            </a:pPr>
+            <a:r>
+              <a:rPr sz="1100">
                 <a:solidFill>
                   <a:srgbClr val="1A202C"/>
                 </a:solidFill>
@@ -5670,11 +5700,11 @@
           <a:p>
             <a:pPr>
               <a:spcAft>
-                <a:spcPts val="300"/>
-              </a:spcAft>
-            </a:pPr>
-            <a:r>
-              <a:rPr sz="1150">
+                <a:spcPts val="100"/>
+              </a:spcAft>
+            </a:pPr>
+            <a:r>
+              <a:rPr sz="1100">
                 <a:solidFill>
                   <a:srgbClr val="1A202C"/>
                 </a:solidFill>
@@ -5692,8 +5722,8 @@
         </p:nvSpPr>
         <p:spPr>
           <a:xfrm>
-            <a:off x="8065008" y="1325880"/>
-            <a:ext cx="3611880" cy="2148840"/>
+            <a:off x="8065008" y="1261872"/>
+            <a:ext cx="3639312" cy="2084831"/>
           </a:xfrm>
           <a:prstGeom prst="rect">
             <a:avLst/>
@@ -5722,7 +5752,7 @@
           </a:fontRef>
         </p:style>
         <p:txBody>
-          <a:bodyPr rtlCol="0" anchor="ctr" wrap="square" lIns="109728" tIns="73152"/>
+          <a:bodyPr rtlCol="0" anchor="ctr" wrap="square" lIns="100584" rIns="82296" tIns="54864"/>
           <a:lstStyle/>
           <a:p>
             <a:pPr algn="ctr"/>
@@ -5738,11 +5768,11 @@
           <a:p>
             <a:pPr>
               <a:spcAft>
-                <a:spcPts val="300"/>
-              </a:spcAft>
-            </a:pPr>
-            <a:r>
-              <a:rPr sz="1150">
+                <a:spcPts val="100"/>
+              </a:spcAft>
+            </a:pPr>
+            <a:r>
+              <a:rPr sz="1100">
                 <a:solidFill>
                   <a:srgbClr val="1A202C"/>
                 </a:solidFill>
@@ -5753,11 +5783,11 @@
           <a:p>
             <a:pPr>
               <a:spcAft>
-                <a:spcPts val="300"/>
-              </a:spcAft>
-            </a:pPr>
-            <a:r>
-              <a:rPr sz="1150">
+                <a:spcPts val="100"/>
+              </a:spcAft>
+            </a:pPr>
+            <a:r>
+              <a:rPr sz="1100">
                 <a:solidFill>
                   <a:srgbClr val="1A202C"/>
                 </a:solidFill>
@@ -5768,11 +5798,11 @@
           <a:p>
             <a:pPr>
               <a:spcAft>
-                <a:spcPts val="300"/>
-              </a:spcAft>
-            </a:pPr>
-            <a:r>
-              <a:rPr sz="1150">
+                <a:spcPts val="100"/>
+              </a:spcAft>
+            </a:pPr>
+            <a:r>
+              <a:rPr sz="1100">
                 <a:solidFill>
                   <a:srgbClr val="1A202C"/>
                 </a:solidFill>
@@ -5791,8 +5821,8 @@
           <p:nvPr/>
         </p:nvGraphicFramePr>
         <p:xfrm>
-          <a:off x="502920" y="3703320"/>
-          <a:ext cx="11155678" cy="2240280"/>
+          <a:off x="502920" y="3529584"/>
+          <a:ext cx="11201397" cy="2450592"/>
         </p:xfrm>
         <a:graphic>
           <a:graphicData uri="http://schemas.openxmlformats.org/drawingml/2006/table">
@@ -5801,19 +5831,19 @@
                 <a:tableStyleId>{5C22544A-7EE6-4342-B048-85BDC9FD1C3A}</a:tableStyleId>
               </a:tblPr>
               <a:tblGrid>
-                <a:gridCol w="2574387"/>
-                <a:gridCol w="2059510"/>
-                <a:gridCol w="3604142"/>
-                <a:gridCol w="2917639"/>
+                <a:gridCol w="2584938"/>
+                <a:gridCol w="2067950"/>
+                <a:gridCol w="3618913"/>
+                <a:gridCol w="2929596"/>
               </a:tblGrid>
-              <a:tr h="373380">
-                <a:tc>
-                  <a:txBody>
-                    <a:bodyPr wrap="square"/>
-                    <a:lstStyle/>
-                    <a:p>
-                      <a:r>
-                        <a:rPr sz="950" b="1">
+              <a:tr h="408432">
+                <a:tc>
+                  <a:txBody>
+                    <a:bodyPr wrap="square"/>
+                    <a:lstStyle/>
+                    <a:p>
+                      <a:r>
+                        <a:rPr sz="900" b="1">
                           <a:solidFill>
                             <a:srgbClr val="FFFFFF"/>
                           </a:solidFill>
@@ -5834,7 +5864,7 @@
                     <a:lstStyle/>
                     <a:p>
                       <a:r>
-                        <a:rPr sz="950" b="1">
+                        <a:rPr sz="900" b="1">
                           <a:solidFill>
                             <a:srgbClr val="FFFFFF"/>
                           </a:solidFill>
@@ -5855,7 +5885,7 @@
                     <a:lstStyle/>
                     <a:p>
                       <a:r>
-                        <a:rPr sz="950" b="1">
+                        <a:rPr sz="900" b="1">
                           <a:solidFill>
                             <a:srgbClr val="FFFFFF"/>
                           </a:solidFill>
@@ -5876,7 +5906,7 @@
                     <a:lstStyle/>
                     <a:p>
                       <a:r>
-                        <a:rPr sz="950" b="1">
+                        <a:rPr sz="900" b="1">
                           <a:solidFill>
                             <a:srgbClr val="FFFFFF"/>
                           </a:solidFill>
@@ -5892,14 +5922,14 @@
                   </a:tcPr>
                 </a:tc>
               </a:tr>
-              <a:tr h="373380">
-                <a:tc>
-                  <a:txBody>
-                    <a:bodyPr wrap="square"/>
-                    <a:lstStyle/>
-                    <a:p>
-                      <a:r>
-                        <a:rPr sz="950">
+              <a:tr h="408432">
+                <a:tc>
+                  <a:txBody>
+                    <a:bodyPr wrap="square"/>
+                    <a:lstStyle/>
+                    <a:p>
+                      <a:r>
+                        <a:rPr sz="900">
                           <a:solidFill>
                             <a:srgbClr val="1A202C"/>
                           </a:solidFill>
@@ -5920,7 +5950,7 @@
                     <a:lstStyle/>
                     <a:p>
                       <a:r>
-                        <a:rPr sz="950">
+                        <a:rPr sz="900">
                           <a:solidFill>
                             <a:srgbClr val="1A202C"/>
                           </a:solidFill>
@@ -5941,12 +5971,12 @@
                     <a:lstStyle/>
                     <a:p>
                       <a:r>
-                        <a:rPr sz="950">
+                        <a:rPr sz="900">
                           <a:solidFill>
                             <a:srgbClr val="1A202C"/>
                           </a:solidFill>
                         </a:rPr>
-                        <a:t>零第三方依赖，评委可二次复验；可离线跑</a:t>
+                        <a:t>零第三方依赖；容器内逐字节一致</a:t>
                       </a:r>
                     </a:p>
                   </a:txBody>
@@ -5962,7 +5992,7 @@
                     <a:lstStyle/>
                     <a:p>
                       <a:r>
-                        <a:rPr sz="950">
+                        <a:rPr sz="900">
                           <a:solidFill>
                             <a:srgbClr val="1A202C"/>
                           </a:solidFill>
@@ -5978,14 +6008,14 @@
                   </a:tcPr>
                 </a:tc>
               </a:tr>
-              <a:tr h="373380">
-                <a:tc>
-                  <a:txBody>
-                    <a:bodyPr wrap="square"/>
-                    <a:lstStyle/>
-                    <a:p>
-                      <a:r>
-                        <a:rPr sz="950">
+              <a:tr h="408432">
+                <a:tc>
+                  <a:txBody>
+                    <a:bodyPr wrap="square"/>
+                    <a:lstStyle/>
+                    <a:p>
+                      <a:r>
+                        <a:rPr sz="900">
                           <a:solidFill>
                             <a:srgbClr val="1A202C"/>
                           </a:solidFill>
@@ -6006,7 +6036,7 @@
                     <a:lstStyle/>
                     <a:p>
                       <a:r>
-                        <a:rPr sz="950">
+                        <a:rPr sz="900">
                           <a:solidFill>
                             <a:srgbClr val="1A202C"/>
                           </a:solidFill>
@@ -6027,7 +6057,7 @@
                     <a:lstStyle/>
                     <a:p>
                       <a:r>
-                        <a:rPr sz="950">
+                        <a:rPr sz="900">
                           <a:solidFill>
                             <a:srgbClr val="1A202C"/>
                           </a:solidFill>
@@ -6048,12 +6078,12 @@
                     <a:lstStyle/>
                     <a:p>
                       <a:r>
-                        <a:rPr sz="950">
+                        <a:rPr sz="900">
                           <a:solidFill>
                             <a:srgbClr val="1A202C"/>
                           </a:solidFill>
                         </a:rPr>
-                        <a:t>平台耦合；沙箱能力需实测（已实测）</a:t>
+                        <a:t>平台耦合；ELSE 分支无运行证据</a:t>
                       </a:r>
                     </a:p>
                   </a:txBody>
@@ -6064,24 +6094,196 @@
                   </a:tcPr>
                 </a:tc>
               </a:tr>
-              <a:tr h="373380">
-                <a:tc>
-                  <a:txBody>
-                    <a:bodyPr wrap="square"/>
-                    <a:lstStyle/>
-                    <a:p>
-                      <a:r>
-                        <a:rPr sz="950">
+              <a:tr h="408432">
+                <a:tc>
+                  <a:txBody>
+                    <a:bodyPr wrap="square"/>
+                    <a:lstStyle/>
+                    <a:p>
+                      <a:r>
+                        <a:rPr sz="900">
                           <a:solidFill>
                             <a:srgbClr val="1A202C"/>
                           </a:solidFill>
                         </a:rPr>
+                        <a:t>DeepSeek 模型节点</a:t>
+                      </a:r>
+                    </a:p>
+                  </a:txBody>
+                  <a:tcPr>
+                    <a:solidFill>
+                      <a:srgbClr val="FFFFFF"/>
+                    </a:solidFill>
+                  </a:tcPr>
+                </a:tc>
+                <a:tc>
+                  <a:txBody>
+                    <a:bodyPr wrap="square"/>
+                    <a:lstStyle/>
+                    <a:p>
+                      <a:r>
+                        <a:rPr sz="900">
+                          <a:solidFill>
+                            <a:srgbClr val="1A202C"/>
+                          </a:solidFill>
+                        </a:rPr>
+                        <a:t>N2 生成 / N5 修订</a:t>
+                      </a:r>
+                    </a:p>
+                  </a:txBody>
+                  <a:tcPr>
+                    <a:solidFill>
+                      <a:srgbClr val="FFFFFF"/>
+                    </a:solidFill>
+                  </a:tcPr>
+                </a:tc>
+                <a:tc>
+                  <a:txBody>
+                    <a:bodyPr wrap="square"/>
+                    <a:lstStyle/>
+                    <a:p>
+                      <a:r>
+                        <a:rPr sz="900">
+                          <a:solidFill>
+                            <a:srgbClr val="1A202C"/>
+                          </a:solidFill>
+                        </a:rPr>
+                        <a:t>真实调用已跑通，token 可服务端采集</a:t>
+                      </a:r>
+                    </a:p>
+                  </a:txBody>
+                  <a:tcPr>
+                    <a:solidFill>
+                      <a:srgbClr val="FFFFFF"/>
+                    </a:solidFill>
+                  </a:tcPr>
+                </a:tc>
+                <a:tc>
+                  <a:txBody>
+                    <a:bodyPr wrap="square"/>
+                    <a:lstStyle/>
+                    <a:p>
+                      <a:r>
+                        <a:rPr sz="900">
+                          <a:solidFill>
+                            <a:srgbClr val="1A202C"/>
+                          </a:solidFill>
+                        </a:rPr>
+                        <a:t>用户自备额度；单价未核实</a:t>
+                      </a:r>
+                    </a:p>
+                  </a:txBody>
+                  <a:tcPr>
+                    <a:solidFill>
+                      <a:srgbClr val="FFFFFF"/>
+                    </a:solidFill>
+                  </a:tcPr>
+                </a:tc>
+              </a:tr>
+              <a:tr h="408432">
+                <a:tc>
+                  <a:txBody>
+                    <a:bodyPr wrap="square"/>
+                    <a:lstStyle/>
+                    <a:p>
+                      <a:r>
+                        <a:rPr sz="900">
+                          <a:solidFill>
+                            <a:srgbClr val="1A202C"/>
+                          </a:solidFill>
+                        </a:rPr>
                         <a:t>Node.js（零依赖）</a:t>
                       </a:r>
                     </a:p>
                   </a:txBody>
                   <a:tcPr>
                     <a:solidFill>
+                      <a:srgbClr val="F4F7FC"/>
+                    </a:solidFill>
+                  </a:tcPr>
+                </a:tc>
+                <a:tc>
+                  <a:txBody>
+                    <a:bodyPr wrap="square"/>
+                    <a:lstStyle/>
+                    <a:p>
+                      <a:r>
+                        <a:rPr sz="900">
+                          <a:solidFill>
+                            <a:srgbClr val="1A202C"/>
+                          </a:solidFill>
+                        </a:rPr>
+                        <a:t>中文页面 + 薄接入层</a:t>
+                      </a:r>
+                    </a:p>
+                  </a:txBody>
+                  <a:tcPr>
+                    <a:solidFill>
+                      <a:srgbClr val="F4F7FC"/>
+                    </a:solidFill>
+                  </a:tcPr>
+                </a:tc>
+                <a:tc>
+                  <a:txBody>
+                    <a:bodyPr wrap="square"/>
+                    <a:lstStyle/>
+                    <a:p>
+                      <a:r>
+                        <a:rPr sz="900">
+                          <a:solidFill>
+                            <a:srgbClr val="1A202C"/>
+                          </a:solidFill>
+                        </a:rPr>
+                        <a:t>无需构建工具链，本地即可演示</a:t>
+                      </a:r>
+                    </a:p>
+                  </a:txBody>
+                  <a:tcPr>
+                    <a:solidFill>
+                      <a:srgbClr val="F4F7FC"/>
+                    </a:solidFill>
+                  </a:tcPr>
+                </a:tc>
+                <a:tc>
+                  <a:txBody>
+                    <a:bodyPr wrap="square"/>
+                    <a:lstStyle/>
+                    <a:p>
+                      <a:r>
+                        <a:rPr sz="900">
+                          <a:solidFill>
+                            <a:srgbClr val="1A202C"/>
+                          </a:solidFill>
+                        </a:rPr>
+                        <a:t>无框架；无性能数据、未在真实浏览器验证</a:t>
+                      </a:r>
+                    </a:p>
+                  </a:txBody>
+                  <a:tcPr>
+                    <a:solidFill>
+                      <a:srgbClr val="F4F7FC"/>
+                    </a:solidFill>
+                  </a:tcPr>
+                </a:tc>
+              </a:tr>
+              <a:tr h="408432">
+                <a:tc>
+                  <a:txBody>
+                    <a:bodyPr wrap="square"/>
+                    <a:lstStyle/>
+                    <a:p>
+                      <a:r>
+                        <a:rPr sz="900">
+                          <a:solidFill>
+                            <a:srgbClr val="1A202C"/>
+                          </a:solidFill>
+                        </a:rPr>
+                        <a:t>Docker（本机实测）</a:t>
+                      </a:r>
+                    </a:p>
+                  </a:txBody>
+                  <a:tcPr>
+                    <a:solidFill>
                       <a:srgbClr val="FFFFFF"/>
                     </a:solidFill>
                   </a:tcPr>
@@ -6092,12 +6294,12 @@
                     <a:lstStyle/>
                     <a:p>
                       <a:r>
-                        <a:rPr sz="950">
+                        <a:rPr sz="900">
                           <a:solidFill>
                             <a:srgbClr val="1A202C"/>
                           </a:solidFill>
                         </a:rPr>
-                        <a:t>中文页面 + 薄接入层</a:t>
+                        <a:t>可复现打包</a:t>
                       </a:r>
                     </a:p>
                   </a:txBody>
@@ -6113,12 +6315,12 @@
                     <a:lstStyle/>
                     <a:p>
                       <a:r>
-                        <a:rPr sz="950">
+                        <a:rPr sz="900">
                           <a:solidFill>
                             <a:srgbClr val="1A202C"/>
                           </a:solidFill>
                         </a:rPr>
-                        <a:t>无需构建工具链，本地即可演示</a:t>
+                        <a:t>178 MB；冷 2.2 s／热 0.6 s；9/9 项通过</a:t>
                       </a:r>
                     </a:p>
                   </a:txBody>
@@ -6134,184 +6336,12 @@
                     <a:lstStyle/>
                     <a:p>
                       <a:r>
-                        <a:rPr sz="950">
+                        <a:rPr sz="900">
                           <a:solidFill>
                             <a:srgbClr val="1A202C"/>
                           </a:solidFill>
                         </a:rPr>
-                        <a:t>无框架，UI 规模受限</a:t>
-                      </a:r>
-                    </a:p>
-                  </a:txBody>
-                  <a:tcPr>
-                    <a:solidFill>
-                      <a:srgbClr val="FFFFFF"/>
-                    </a:solidFill>
-                  </a:tcPr>
-                </a:tc>
-              </a:tr>
-              <a:tr h="373380">
-                <a:tc>
-                  <a:txBody>
-                    <a:bodyPr wrap="square"/>
-                    <a:lstStyle/>
-                    <a:p>
-                      <a:r>
-                        <a:rPr sz="950">
-                          <a:solidFill>
-                            <a:srgbClr val="1A202C"/>
-                          </a:solidFill>
-                        </a:rPr>
-                        <a:t>Docker（未构建）</a:t>
-                      </a:r>
-                    </a:p>
-                  </a:txBody>
-                  <a:tcPr>
-                    <a:solidFill>
-                      <a:srgbClr val="F4F7FC"/>
-                    </a:solidFill>
-                  </a:tcPr>
-                </a:tc>
-                <a:tc>
-                  <a:txBody>
-                    <a:bodyPr wrap="square"/>
-                    <a:lstStyle/>
-                    <a:p>
-                      <a:r>
-                        <a:rPr sz="950">
-                          <a:solidFill>
-                            <a:srgbClr val="1A202C"/>
-                          </a:solidFill>
-                        </a:rPr>
-                        <a:t>可复现打包</a:t>
-                      </a:r>
-                    </a:p>
-                  </a:txBody>
-                  <a:tcPr>
-                    <a:solidFill>
-                      <a:srgbClr val="F4F7FC"/>
-                    </a:solidFill>
-                  </a:tcPr>
-                </a:tc>
-                <a:tc>
-                  <a:txBody>
-                    <a:bodyPr wrap="square"/>
-                    <a:lstStyle/>
-                    <a:p>
-                      <a:r>
-                        <a:rPr sz="950">
-                          <a:solidFill>
-                            <a:srgbClr val="1A202C"/>
-                          </a:solidFill>
-                        </a:rPr>
-                        <a:t>便于交付与复验</a:t>
-                      </a:r>
-                    </a:p>
-                  </a:txBody>
-                  <a:tcPr>
-                    <a:solidFill>
-                      <a:srgbClr val="F4F7FC"/>
-                    </a:solidFill>
-                  </a:tcPr>
-                </a:tc>
-                <a:tc>
-                  <a:txBody>
-                    <a:bodyPr wrap="square"/>
-                    <a:lstStyle/>
-                    <a:p>
-                      <a:r>
-                        <a:rPr sz="950">
-                          <a:solidFill>
-                            <a:srgbClr val="1A202C"/>
-                          </a:solidFill>
-                        </a:rPr>
-                        <a:t>仅在赛题强制或确有需要时采用</a:t>
-                      </a:r>
-                    </a:p>
-                  </a:txBody>
-                  <a:tcPr>
-                    <a:solidFill>
-                      <a:srgbClr val="F4F7FC"/>
-                    </a:solidFill>
-                  </a:tcPr>
-                </a:tc>
-              </a:tr>
-              <a:tr h="373380">
-                <a:tc>
-                  <a:txBody>
-                    <a:bodyPr wrap="square"/>
-                    <a:lstStyle/>
-                    <a:p>
-                      <a:r>
-                        <a:rPr sz="950">
-                          <a:solidFill>
-                            <a:srgbClr val="1A202C"/>
-                          </a:solidFill>
-                        </a:rPr>
-                        <a:t>UCloud（未部署）</a:t>
-                      </a:r>
-                    </a:p>
-                  </a:txBody>
-                  <a:tcPr>
-                    <a:solidFill>
-                      <a:srgbClr val="FFFFFF"/>
-                    </a:solidFill>
-                  </a:tcPr>
-                </a:tc>
-                <a:tc>
-                  <a:txBody>
-                    <a:bodyPr wrap="square"/>
-                    <a:lstStyle/>
-                    <a:p>
-                      <a:r>
-                        <a:rPr sz="950">
-                          <a:solidFill>
-                            <a:srgbClr val="1A202C"/>
-                          </a:solidFill>
-                        </a:rPr>
-                        <a:t>托管校验 API</a:t>
-                      </a:r>
-                    </a:p>
-                  </a:txBody>
-                  <a:tcPr>
-                    <a:solidFill>
-                      <a:srgbClr val="FFFFFF"/>
-                    </a:solidFill>
-                  </a:tcPr>
-                </a:tc>
-                <a:tc>
-                  <a:txBody>
-                    <a:bodyPr wrap="square"/>
-                    <a:lstStyle/>
-                    <a:p>
-                      <a:r>
-                        <a:rPr sz="950">
-                          <a:solidFill>
-                            <a:srgbClr val="1A202C"/>
-                          </a:solidFill>
-                        </a:rPr>
-                        <a:t>满足「可访问入口」</a:t>
-                      </a:r>
-                    </a:p>
-                  </a:txBody>
-                  <a:tcPr>
-                    <a:solidFill>
-                      <a:srgbClr val="FFFFFF"/>
-                    </a:solidFill>
-                  </a:tcPr>
-                </a:tc>
-                <a:tc>
-                  <a:txBody>
-                    <a:bodyPr wrap="square"/>
-                    <a:lstStyle/>
-                    <a:p>
-                      <a:r>
-                        <a:rPr sz="950">
-                          <a:solidFill>
-                            <a:srgbClr val="1A202C"/>
-                          </a:solidFill>
-                        </a:rPr>
-                        <a:t>未开通、未付费；资源未知</a:t>
+                        <a:t>未推镜像仓库、未上云；单机基线≠生产容量</a:t>
                       </a:r>
                     </a:p>
                   </a:txBody>
@@ -6334,8 +6364,8 @@
         </p:nvSpPr>
         <p:spPr>
           <a:xfrm>
-            <a:off x="502920" y="6419088"/>
-            <a:ext cx="11155680" cy="310896"/>
+            <a:off x="502920" y="6364224"/>
+            <a:ext cx="11201400" cy="420624"/>
           </a:xfrm>
           <a:prstGeom prst="rect">
             <a:avLst/>
@@ -6349,12 +6379,12 @@
           <a:lstStyle/>
           <a:p>
             <a:r>
-              <a:rPr sz="1000">
+              <a:rPr sz="950">
                 <a:solidFill>
                   <a:srgbClr val="606B7C"/>
                 </a:solidFill>
               </a:rPr>
-              <a:t>明确不做：不上微服务、不上 K8s、不引数据库 —— 当前负载与状态量没有任何证据支持这些复杂度（评分规则要求「能解释取舍」）。</a:t>
+              <a:t>明确不做：不上微服务、不上 K8s、不引数据库 —— 云部署从未发生，无任何容量证据支持这些复杂度。</a:t>
             </a:r>
           </a:p>
         </p:txBody>
@@ -6428,8 +6458,8 @@
         </p:nvSpPr>
         <p:spPr>
           <a:xfrm>
-            <a:off x="502920" y="274320"/>
-            <a:ext cx="11155680" cy="658368"/>
+            <a:off x="502920" y="219456"/>
+            <a:ext cx="11201400" cy="603504"/>
           </a:xfrm>
           <a:prstGeom prst="rect">
             <a:avLst/>
@@ -6443,7 +6473,7 @@
           <a:lstStyle/>
           <a:p>
             <a:r>
-              <a:rPr sz="2500" b="1">
+              <a:rPr sz="2400" b="1">
                 <a:solidFill>
                   <a:srgbClr val="1A202C"/>
                 </a:solidFill>
@@ -6461,8 +6491,8 @@
         </p:nvSpPr>
         <p:spPr>
           <a:xfrm>
-            <a:off x="521207" y="896112"/>
-            <a:ext cx="11155680" cy="329184"/>
+            <a:off x="521207" y="822960"/>
+            <a:ext cx="11201400" cy="365760"/>
           </a:xfrm>
           <a:prstGeom prst="rect">
             <a:avLst/>
@@ -6476,7 +6506,7 @@
           <a:lstStyle/>
           <a:p>
             <a:r>
-              <a:rPr sz="1300">
+              <a:rPr sz="1200">
                 <a:solidFill>
                   <a:srgbClr val="606B7C"/>
                 </a:solidFill>
@@ -6502,8 +6532,8 @@
         </p:blipFill>
         <p:spPr>
           <a:xfrm>
-            <a:off x="658368" y="1325880"/>
-            <a:ext cx="7141945" cy="4846320"/>
+            <a:off x="640080" y="1298448"/>
+            <a:ext cx="6985078" cy="4864608"/>
           </a:xfrm>
           <a:prstGeom prst="rect">
             <a:avLst/>
@@ -6518,8 +6548,8 @@
         </p:nvSpPr>
         <p:spPr>
           <a:xfrm>
-            <a:off x="9555480" y="1371600"/>
-            <a:ext cx="2240280" cy="4846320"/>
+            <a:off x="9381744" y="1325880"/>
+            <a:ext cx="2395728" cy="4937760"/>
           </a:xfrm>
           <a:prstGeom prst="rect">
             <a:avLst/>
@@ -6538,12 +6568,12 @@
               </a:spcAft>
             </a:pPr>
             <a:r>
-              <a:rPr sz="1050" b="1">
-                <a:solidFill>
-                  <a:srgbClr val="1A202C"/>
-                </a:solidFill>
-              </a:rPr>
-              <a:t>• Agent 链路 N1–N7</a:t>
+              <a:rPr sz="950" b="1">
+                <a:solidFill>
+                  <a:srgbClr val="1A202C"/>
+                </a:solidFill>
+              </a:rPr>
+              <a:t>• Agent 链路 N1–N7（已接线）</a:t>
             </a:r>
           </a:p>
           <a:p>
@@ -6553,12 +6583,12 @@
               </a:spcAft>
             </a:pPr>
             <a:r>
-              <a:rPr sz="900" b="0">
-                <a:solidFill>
-                  <a:srgbClr val="1A202C"/>
-                </a:solidFill>
-              </a:rPr>
-              <a:t>– N1 输入 → N2 生成 3 候选</a:t>
+              <a:rPr sz="800" b="0">
+                <a:solidFill>
+                  <a:srgbClr val="1A202C"/>
+                </a:solidFill>
+              </a:rPr>
+              <a:t>– N1 输入 → N2 真实生成</a:t>
             </a:r>
           </a:p>
           <a:p>
@@ -6568,7 +6598,7 @@
               </a:spcAft>
             </a:pPr>
             <a:r>
-              <a:rPr sz="900" b="0">
+              <a:rPr sz="800" b="0">
                 <a:solidFill>
                   <a:srgbClr val="1A202C"/>
                 </a:solidFill>
@@ -6583,12 +6613,12 @@
               </a:spcAft>
             </a:pPr>
             <a:r>
-              <a:rPr sz="900" b="0">
-                <a:solidFill>
-                  <a:srgbClr val="1A202C"/>
-                </a:solidFill>
-              </a:rPr>
-              <a:t>– N4 分支 → N5 修订 1 次 → N6 重检</a:t>
+              <a:rPr sz="800" b="0">
+                <a:solidFill>
+                  <a:srgbClr val="1A202C"/>
+                </a:solidFill>
+              </a:rPr>
+              <a:t>– N4 分支 → N5 真实修订</a:t>
             </a:r>
           </a:p>
           <a:p>
@@ -6598,12 +6628,12 @@
               </a:spcAft>
             </a:pPr>
             <a:r>
-              <a:rPr sz="900" b="0">
-                <a:solidFill>
-                  <a:srgbClr val="1A202C"/>
-                </a:solidFill>
-              </a:rPr>
-              <a:t>– N7 报告 → 用户选择</a:t>
+              <a:rPr sz="800" b="0">
+                <a:solidFill>
+                  <a:srgbClr val="1A202C"/>
+                </a:solidFill>
+              </a:rPr>
+              <a:t>– N6 重检 → N7 → EndA/EndB</a:t>
             </a:r>
           </a:p>
           <a:p>
@@ -6613,12 +6643,12 @@
               </a:spcAft>
             </a:pPr>
             <a:r>
-              <a:rPr sz="900" b="0">
-                <a:solidFill>
-                  <a:srgbClr val="1A202C"/>
-                </a:solidFill>
-              </a:rPr>
-              <a:t>– 呈现：配色→包装→贺卡→赠送</a:t>
+              <a:rPr sz="800" b="0">
+                <a:solidFill>
+                  <a:srgbClr val="1A202C"/>
+                </a:solidFill>
+              </a:rPr>
+              <a:t>– 11 节点 11 边</a:t>
             </a:r>
           </a:p>
           <a:p>
@@ -6628,12 +6658,12 @@
               </a:spcAft>
             </a:pPr>
             <a:r>
-              <a:rPr sz="1050" b="1">
+              <a:rPr sz="950" b="1">
                 <a:solidFill>
                   <a:srgbClr val="0E7C4F"/>
                 </a:solidFill>
               </a:rPr>
-              <a:t>• E 已实现</a:t>
+              <a:t>• A 已实测</a:t>
             </a:r>
           </a:p>
           <a:p>
@@ -6643,12 +6673,12 @@
               </a:spcAft>
             </a:pPr>
             <a:r>
-              <a:rPr sz="900" b="0">
-                <a:solidFill>
-                  <a:srgbClr val="1A202C"/>
-                </a:solidFill>
-              </a:rPr>
-              <a:t>– 规则真源 validator/rules.py</a:t>
+              <a:rPr sz="800" b="0">
+                <a:solidFill>
+                  <a:srgbClr val="1A202C"/>
+                </a:solidFill>
+              </a:rPr>
+              <a:t>– 真实模型 10 次 / 34,127 tokens</a:t>
             </a:r>
           </a:p>
           <a:p>
@@ -6658,12 +6688,12 @@
               </a:spcAft>
             </a:pPr>
             <a:r>
-              <a:rPr sz="900" b="0">
-                <a:solidFill>
-                  <a:srgbClr val="1A202C"/>
-                </a:solidFill>
-              </a:rPr>
-              <a:t>– 生成 Code 节点源码 + 哈希清单</a:t>
+              <a:rPr sz="800" b="0">
+                <a:solidFill>
+                  <a:srgbClr val="1A202C"/>
+                </a:solidFill>
+              </a:rPr>
+              <a:t>– N2 4.5–6.0 s；N5 3.0–3.1 s</a:t>
             </a:r>
           </a:p>
           <a:p>
@@ -6673,12 +6703,12 @@
               </a:spcAft>
             </a:pPr>
             <a:r>
-              <a:rPr sz="900" b="0">
-                <a:solidFill>
-                  <a:srgbClr val="1A202C"/>
-                </a:solidFill>
-              </a:rPr>
-              <a:t>– 真实沙箱跑通（0 Tokens）</a:t>
+              <a:rPr sz="800" b="0">
+                <a:solidFill>
+                  <a:srgbClr val="1A202C"/>
+                </a:solidFill>
+              </a:rPr>
+              <a:t>– Code 节点 0.067–0.238 s</a:t>
             </a:r>
           </a:p>
           <a:p>
@@ -6688,12 +6718,12 @@
               </a:spcAft>
             </a:pPr>
             <a:r>
-              <a:rPr sz="900" b="0">
-                <a:solidFill>
-                  <a:srgbClr val="1A202C"/>
-                </a:solidFill>
-              </a:rPr>
-              <a:t>– 接入层 mock 链路完整</a:t>
+              <a:rPr sz="800" b="0">
+                <a:solidFill>
+                  <a:srgbClr val="1A202C"/>
+                </a:solidFill>
+              </a:rPr>
+              <a:t>– 本机容器 9/9、178 MB</a:t>
             </a:r>
           </a:p>
           <a:p>
@@ -6703,12 +6733,12 @@
               </a:spcAft>
             </a:pPr>
             <a:r>
-              <a:rPr sz="1050" b="1">
+              <a:rPr sz="950" b="1">
                 <a:solidFill>
                   <a:srgbClr val="B42828"/>
                 </a:solidFill>
               </a:rPr>
-              <a:t>• P 未完成</a:t>
+              <a:t>• B 未完成</a:t>
             </a:r>
           </a:p>
           <a:p>
@@ -6718,12 +6748,12 @@
               </a:spcAft>
             </a:pPr>
             <a:r>
-              <a:rPr sz="900" b="0">
-                <a:solidFill>
-                  <a:srgbClr val="1A202C"/>
-                </a:solidFill>
-              </a:rPr>
-              <a:t>– N1–N7 未接线</a:t>
+              <a:rPr sz="800" b="0">
+                <a:solidFill>
+                  <a:srgbClr val="1A202C"/>
+                </a:solidFill>
+              </a:rPr>
+              <a:t>– 未发布、未创建版本</a:t>
             </a:r>
           </a:p>
           <a:p>
@@ -6733,12 +6763,12 @@
               </a:spcAft>
             </a:pPr>
             <a:r>
-              <a:rPr sz="900" b="0">
-                <a:solidFill>
-                  <a:srgbClr val="1A202C"/>
-                </a:solidFill>
-              </a:rPr>
-              <a:t>– 草稿 2 节点 1 边、无结束节点</a:t>
+              <a:rPr sz="800" b="0">
+                <a:solidFill>
+                  <a:srgbClr val="1A202C"/>
+                </a:solidFill>
+              </a:rPr>
+              <a:t>– trace 不可用（not_collected）</a:t>
             </a:r>
           </a:p>
           <a:p>
@@ -6748,12 +6778,12 @@
               </a:spcAft>
             </a:pPr>
             <a:r>
-              <a:rPr sz="900" b="0">
-                <a:solidFill>
-                  <a:srgbClr val="1A202C"/>
-                </a:solidFill>
-              </a:rPr>
-              <a:t>– 草稿未发布</a:t>
+              <a:rPr sz="800" b="0">
+                <a:solidFill>
+                  <a:srgbClr val="1A202C"/>
+                </a:solidFill>
+              </a:rPr>
+              <a:t>– N4 ELSE 未触发</a:t>
             </a:r>
           </a:p>
           <a:p>
@@ -6763,12 +6793,12 @@
               </a:spcAft>
             </a:pPr>
             <a:r>
-              <a:rPr sz="900" b="0">
-                <a:solidFill>
-                  <a:srgbClr val="1A202C"/>
-                </a:solidFill>
-              </a:rPr>
-              <a:t>– 模型从未被调用</a:t>
+              <a:rPr sz="800" b="0">
+                <a:solidFill>
+                  <a:srgbClr val="1A202C"/>
+                </a:solidFill>
+              </a:rPr>
+              <a:t>– 无自然 OVER_BUDGET /</a:t>
             </a:r>
           </a:p>
           <a:p>
@@ -6778,12 +6808,42 @@
               </a:spcAft>
             </a:pPr>
             <a:r>
-              <a:rPr sz="900" b="0">
-                <a:solidFill>
-                  <a:srgbClr val="1A202C"/>
-                </a:solidFill>
-              </a:rPr>
-              <a:t>– Docker / 云部署未做</a:t>
+              <a:rPr sz="800" b="0">
+                <a:solidFill>
+                  <a:srgbClr val="1A202C"/>
+                </a:solidFill>
+              </a:rPr>
+              <a:t>– FORBIDDEN_TAG 证据</a:t>
+            </a:r>
+          </a:p>
+          <a:p>
+            <a:pPr lvl="1">
+              <a:spcAft>
+                <a:spcPts val="500"/>
+              </a:spcAft>
+            </a:pPr>
+            <a:r>
+              <a:rPr sz="800" b="0">
+                <a:solidFill>
+                  <a:srgbClr val="1A202C"/>
+                </a:solidFill>
+              </a:rPr>
+              <a:t>– Dify 侧呈现阶段未实现</a:t>
+            </a:r>
+          </a:p>
+          <a:p>
+            <a:pPr lvl="1">
+              <a:spcAft>
+                <a:spcPts val="500"/>
+              </a:spcAft>
+            </a:pPr>
+            <a:r>
+              <a:rPr sz="800" b="0">
+                <a:solidFill>
+                  <a:srgbClr val="1A202C"/>
+                </a:solidFill>
+              </a:rPr>
+              <a:t>– 未上云、未推镜像仓库</a:t>
             </a:r>
           </a:p>
         </p:txBody>
@@ -6796,8 +6856,8 @@
         </p:nvSpPr>
         <p:spPr>
           <a:xfrm>
-            <a:off x="502920" y="6419088"/>
-            <a:ext cx="11155680" cy="310896"/>
+            <a:off x="502920" y="6364224"/>
+            <a:ext cx="11201400" cy="420624"/>
           </a:xfrm>
           <a:prstGeom prst="rect">
             <a:avLst/>
@@ -6811,7 +6871,7 @@
           <a:lstStyle/>
           <a:p>
             <a:r>
-              <a:rPr sz="1000">
+              <a:rPr sz="950">
                 <a:solidFill>
                   <a:srgbClr val="606B7C"/>
                 </a:solidFill>
@@ -6890,8 +6950,8 @@
         </p:nvSpPr>
         <p:spPr>
           <a:xfrm>
-            <a:off x="502920" y="274320"/>
-            <a:ext cx="11155680" cy="658368"/>
+            <a:off x="502920" y="219456"/>
+            <a:ext cx="11201400" cy="603504"/>
           </a:xfrm>
           <a:prstGeom prst="rect">
             <a:avLst/>
@@ -6905,12 +6965,12 @@
           <a:lstStyle/>
           <a:p>
             <a:r>
-              <a:rPr sz="2500" b="1">
-                <a:solidFill>
-                  <a:srgbClr val="1A202C"/>
-                </a:solidFill>
-              </a:rPr>
-              <a:t>⑤ 结果与证据（已核实 / 未核实分开）</a:t>
+              <a:rPr sz="2400" b="1">
+                <a:solidFill>
+                  <a:srgbClr val="1A202C"/>
+                </a:solidFill>
+              </a:rPr>
+              <a:t>⑤ 结果与证据（只放已有真实证据）</a:t>
             </a:r>
           </a:p>
         </p:txBody>
@@ -6923,8 +6983,8 @@
         </p:nvSpPr>
         <p:spPr>
           <a:xfrm>
-            <a:off x="521207" y="896112"/>
-            <a:ext cx="11155680" cy="329184"/>
+            <a:off x="521207" y="822960"/>
+            <a:ext cx="11201400" cy="365760"/>
           </a:xfrm>
           <a:prstGeom prst="rect">
             <a:avLst/>
@@ -6938,26 +6998,573 @@
           <a:lstStyle/>
           <a:p>
             <a:r>
-              <a:rPr sz="1300">
+              <a:rPr sz="1200">
                 <a:solidFill>
                   <a:srgbClr val="606B7C"/>
                 </a:solidFill>
               </a:rPr>
-              <a:t>本页只放已有真实证据；未完成的写明「P 未完成」</a:t>
-            </a:r>
-          </a:p>
-        </p:txBody>
-      </p:sp>
-      <p:sp>
-        <p:nvSpPr>
-          <p:cNvPr id="5" name="Rectangle 4"/>
+              <a:t>A 组口径逐条可复核；B 组 17 条未完成见第 8 页</a:t>
+            </a:r>
+          </a:p>
+        </p:txBody>
+      </p:sp>
+      <p:graphicFrame>
+        <p:nvGraphicFramePr>
+          <p:cNvPr id="5" name="Table 4"/>
+          <p:cNvGraphicFramePr>
+            <a:graphicFrameLocks noGrp="1"/>
+          </p:cNvGraphicFramePr>
+          <p:nvPr/>
+        </p:nvGraphicFramePr>
+        <p:xfrm>
+          <a:off x="502920" y="1243584"/>
+          <a:ext cx="11201398" cy="3310128"/>
+        </p:xfrm>
+        <a:graphic>
+          <a:graphicData uri="http://schemas.openxmlformats.org/drawingml/2006/table">
+            <a:tbl>
+              <a:tblPr firstRow="1" bandRow="1">
+                <a:tableStyleId>{5C22544A-7EE6-4342-B048-85BDC9FD1C3A}</a:tableStyleId>
+              </a:tblPr>
+              <a:tblGrid>
+                <a:gridCol w="607827"/>
+                <a:gridCol w="6599274"/>
+                <a:gridCol w="3994297"/>
+              </a:tblGrid>
+              <a:tr h="413766">
+                <a:tc>
+                  <a:txBody>
+                    <a:bodyPr wrap="square"/>
+                    <a:lstStyle/>
+                    <a:p>
+                      <a:r>
+                        <a:rPr sz="850" b="1">
+                          <a:solidFill>
+                            <a:srgbClr val="FFFFFF"/>
+                          </a:solidFill>
+                        </a:rPr>
+                        <a:t>#</a:t>
+                      </a:r>
+                    </a:p>
+                  </a:txBody>
+                  <a:tcPr>
+                    <a:solidFill>
+                      <a:srgbClr val="2563EB"/>
+                    </a:solidFill>
+                  </a:tcPr>
+                </a:tc>
+                <a:tc>
+                  <a:txBody>
+                    <a:bodyPr wrap="square"/>
+                    <a:lstStyle/>
+                    <a:p>
+                      <a:r>
+                        <a:rPr sz="850" b="1">
+                          <a:solidFill>
+                            <a:srgbClr val="FFFFFF"/>
+                          </a:solidFill>
+                        </a:rPr>
+                        <a:t>已实测（A 组口径）</a:t>
+                      </a:r>
+                    </a:p>
+                  </a:txBody>
+                  <a:tcPr>
+                    <a:solidFill>
+                      <a:srgbClr val="2563EB"/>
+                    </a:solidFill>
+                  </a:tcPr>
+                </a:tc>
+                <a:tc>
+                  <a:txBody>
+                    <a:bodyPr wrap="square"/>
+                    <a:lstStyle/>
+                    <a:p>
+                      <a:r>
+                        <a:rPr sz="850" b="1">
+                          <a:solidFill>
+                            <a:srgbClr val="FFFFFF"/>
+                          </a:solidFill>
+                        </a:rPr>
+                        <a:t>证据</a:t>
+                      </a:r>
+                    </a:p>
+                  </a:txBody>
+                  <a:tcPr>
+                    <a:solidFill>
+                      <a:srgbClr val="2563EB"/>
+                    </a:solidFill>
+                  </a:tcPr>
+                </a:tc>
+              </a:tr>
+              <a:tr h="413766">
+                <a:tc>
+                  <a:txBody>
+                    <a:bodyPr wrap="square"/>
+                    <a:lstStyle/>
+                    <a:p>
+                      <a:r>
+                        <a:rPr sz="850">
+                          <a:solidFill>
+                            <a:srgbClr val="1A202C"/>
+                          </a:solidFill>
+                        </a:rPr>
+                        <a:t>A1</a:t>
+                      </a:r>
+                    </a:p>
+                  </a:txBody>
+                  <a:tcPr>
+                    <a:solidFill>
+                      <a:srgbClr val="FFFFFF"/>
+                    </a:solidFill>
+                  </a:tcPr>
+                </a:tc>
+                <a:tc>
+                  <a:txBody>
+                    <a:bodyPr wrap="square"/>
+                    <a:lstStyle/>
+                    <a:p>
+                      <a:r>
+                        <a:rPr sz="850">
+                          <a:solidFill>
+                            <a:srgbClr val="1A202C"/>
+                          </a:solidFill>
+                        </a:rPr>
+                        <a:t>本机探针 46 条通过；单元测试 322 条通过</a:t>
+                      </a:r>
+                    </a:p>
+                  </a:txBody>
+                  <a:tcPr>
+                    <a:solidFill>
+                      <a:srgbClr val="FFFFFF"/>
+                    </a:solidFill>
+                  </a:tcPr>
+                </a:tc>
+                <a:tc>
+                  <a:txBody>
+                    <a:bodyPr wrap="square"/>
+                    <a:lstStyle/>
+                    <a:p>
+                      <a:r>
+                        <a:rPr sz="850">
+                          <a:solidFill>
+                            <a:srgbClr val="1A202C"/>
+                          </a:solidFill>
+                        </a:rPr>
+                        <a:t>workflow/verify_local.py、run_verify_local_nopipe.py、unittest discover</a:t>
+                      </a:r>
+                    </a:p>
+                  </a:txBody>
+                  <a:tcPr>
+                    <a:solidFill>
+                      <a:srgbClr val="FFFFFF"/>
+                    </a:solidFill>
+                  </a:tcPr>
+                </a:tc>
+              </a:tr>
+              <a:tr h="413766">
+                <a:tc>
+                  <a:txBody>
+                    <a:bodyPr wrap="square"/>
+                    <a:lstStyle/>
+                    <a:p>
+                      <a:r>
+                        <a:rPr sz="850">
+                          <a:solidFill>
+                            <a:srgbClr val="1A202C"/>
+                          </a:solidFill>
+                        </a:rPr>
+                        <a:t>A2</a:t>
+                      </a:r>
+                    </a:p>
+                  </a:txBody>
+                  <a:tcPr>
+                    <a:solidFill>
+                      <a:srgbClr val="F4F7FC"/>
+                    </a:solidFill>
+                  </a:tcPr>
+                </a:tc>
+                <a:tc>
+                  <a:txBody>
+                    <a:bodyPr wrap="square"/>
+                    <a:lstStyle/>
+                    <a:p>
+                      <a:r>
+                        <a:rPr sz="850">
+                          <a:solidFill>
+                            <a:srgbClr val="1A202C"/>
+                          </a:solidFill>
+                        </a:rPr>
+                        <a:t>Dify 工作流真实运行 10 次模型调用 / 34,127 tokens；N2 约 6.0 s；服务端 0.587–0.888 s；代码节点 0.067–0.238 s</a:t>
+                      </a:r>
+                    </a:p>
+                  </a:txBody>
+                  <a:tcPr>
+                    <a:solidFill>
+                      <a:srgbClr val="F4F7FC"/>
+                    </a:solidFill>
+                  </a:tcPr>
+                </a:tc>
+                <a:tc>
+                  <a:txBody>
+                    <a:bodyPr wrap="square"/>
+                    <a:lstStyle/>
+                    <a:p>
+                      <a:r>
+                        <a:rPr sz="850">
+                          <a:solidFill>
+                            <a:srgbClr val="1A202C"/>
+                          </a:solidFill>
+                        </a:rPr>
+                        <a:t>workflow/evidence/WF-003-2026-10-30/</a:t>
+                      </a:r>
+                    </a:p>
+                  </a:txBody>
+                  <a:tcPr>
+                    <a:solidFill>
+                      <a:srgbClr val="F4F7FC"/>
+                    </a:solidFill>
+                  </a:tcPr>
+                </a:tc>
+              </a:tr>
+              <a:tr h="413766">
+                <a:tc>
+                  <a:txBody>
+                    <a:bodyPr wrap="square"/>
+                    <a:lstStyle/>
+                    <a:p>
+                      <a:r>
+                        <a:rPr sz="850">
+                          <a:solidFill>
+                            <a:srgbClr val="1A202C"/>
+                          </a:solidFill>
+                        </a:rPr>
+                        <a:t>A3</a:t>
+                      </a:r>
+                    </a:p>
+                  </a:txBody>
+                  <a:tcPr>
+                    <a:solidFill>
+                      <a:srgbClr val="FFFFFF"/>
+                    </a:solidFill>
+                  </a:tcPr>
+                </a:tc>
+                <a:tc>
+                  <a:txBody>
+                    <a:bodyPr wrap="square"/>
+                    <a:lstStyle/>
+                    <a:p>
+                      <a:r>
+                        <a:rPr sz="850">
+                          <a:solidFill>
+                            <a:srgbClr val="1A202C"/>
+                          </a:solidFill>
+                        </a:rPr>
+                        <a:t>容器化：镜像 178 MB；冷构建 2.2 s、热构建 0.6 s；启动到 /healthz 200 用 0.75–1.01 s；内存 14.41–17.86 MiB、CPU 0.01%</a:t>
+                      </a:r>
+                    </a:p>
+                  </a:txBody>
+                  <a:tcPr>
+                    <a:solidFill>
+                      <a:srgbClr val="FFFFFF"/>
+                    </a:solidFill>
+                  </a:tcPr>
+                </a:tc>
+                <a:tc>
+                  <a:txBody>
+                    <a:bodyPr wrap="square"/>
+                    <a:lstStyle/>
+                    <a:p>
+                      <a:r>
+                        <a:rPr sz="850">
+                          <a:solidFill>
+                            <a:srgbClr val="1A202C"/>
+                          </a:solidFill>
+                        </a:rPr>
+                        <a:t>deploy/evidence/docker-2026-10-30.md（9/9 项）</a:t>
+                      </a:r>
+                    </a:p>
+                  </a:txBody>
+                  <a:tcPr>
+                    <a:solidFill>
+                      <a:srgbClr val="FFFFFF"/>
+                    </a:solidFill>
+                  </a:tcPr>
+                </a:tc>
+              </a:tr>
+              <a:tr h="413766">
+                <a:tc>
+                  <a:txBody>
+                    <a:bodyPr wrap="square"/>
+                    <a:lstStyle/>
+                    <a:p>
+                      <a:r>
+                        <a:rPr sz="850">
+                          <a:solidFill>
+                            <a:srgbClr val="1A202C"/>
+                          </a:solidFill>
+                        </a:rPr>
+                        <a:t>A4</a:t>
+                      </a:r>
+                    </a:p>
+                  </a:txBody>
+                  <a:tcPr>
+                    <a:solidFill>
+                      <a:srgbClr val="F4F7FC"/>
+                    </a:solidFill>
+                  </a:tcPr>
+                </a:tc>
+                <a:tc>
+                  <a:txBody>
+                    <a:bodyPr wrap="square"/>
+                    <a:lstStyle/>
+                    <a:p>
+                      <a:r>
+                        <a:rPr sz="850">
+                          <a:solidFill>
+                            <a:srgbClr val="1A202C"/>
+                          </a:solidFill>
+                        </a:rPr>
+                        <a:t>容器 POST /validate 与本机 validator.rules.validate 逐字节一致；/healthz 规则哈希与本机 rules.py 一致</a:t>
+                      </a:r>
+                    </a:p>
+                  </a:txBody>
+                  <a:tcPr>
+                    <a:solidFill>
+                      <a:srgbClr val="F4F7FC"/>
+                    </a:solidFill>
+                  </a:tcPr>
+                </a:tc>
+                <a:tc>
+                  <a:txBody>
+                    <a:bodyPr wrap="square"/>
+                    <a:lstStyle/>
+                    <a:p>
+                      <a:r>
+                        <a:rPr sz="850">
+                          <a:solidFill>
+                            <a:srgbClr val="1A202C"/>
+                          </a:solidFill>
+                        </a:rPr>
+                        <a:t>同上</a:t>
+                      </a:r>
+                    </a:p>
+                  </a:txBody>
+                  <a:tcPr>
+                    <a:solidFill>
+                      <a:srgbClr val="F4F7FC"/>
+                    </a:solidFill>
+                  </a:tcPr>
+                </a:tc>
+              </a:tr>
+              <a:tr h="413766">
+                <a:tc>
+                  <a:txBody>
+                    <a:bodyPr wrap="square"/>
+                    <a:lstStyle/>
+                    <a:p>
+                      <a:r>
+                        <a:rPr sz="850">
+                          <a:solidFill>
+                            <a:srgbClr val="1A202C"/>
+                          </a:solidFill>
+                        </a:rPr>
+                        <a:t>A5</a:t>
+                      </a:r>
+                    </a:p>
+                  </a:txBody>
+                  <a:tcPr>
+                    <a:solidFill>
+                      <a:srgbClr val="FFFFFF"/>
+                    </a:solidFill>
+                  </a:tcPr>
+                </a:tc>
+                <a:tc>
+                  <a:txBody>
+                    <a:bodyPr wrap="square"/>
+                    <a:lstStyle/>
+                    <a:p>
+                      <a:r>
+                        <a:rPr sz="850">
+                          <a:solidFill>
+                            <a:srgbClr val="1A202C"/>
+                          </a:solidFill>
+                        </a:rPr>
+                        <a:t>镜像内无密钥、无 .git/tests/docs/workflow；以非 root（uid 10001）运行</a:t>
+                      </a:r>
+                    </a:p>
+                  </a:txBody>
+                  <a:tcPr>
+                    <a:solidFill>
+                      <a:srgbClr val="FFFFFF"/>
+                    </a:solidFill>
+                  </a:tcPr>
+                </a:tc>
+                <a:tc>
+                  <a:txBody>
+                    <a:bodyPr wrap="square"/>
+                    <a:lstStyle/>
+                    <a:p>
+                      <a:r>
+                        <a:rPr sz="850">
+                          <a:solidFill>
+                            <a:srgbClr val="1A202C"/>
+                          </a:solidFill>
+                        </a:rPr>
+                        <a:t>同上</a:t>
+                      </a:r>
+                    </a:p>
+                  </a:txBody>
+                  <a:tcPr>
+                    <a:solidFill>
+                      <a:srgbClr val="FFFFFF"/>
+                    </a:solidFill>
+                  </a:tcPr>
+                </a:tc>
+              </a:tr>
+              <a:tr h="413766">
+                <a:tc>
+                  <a:txBody>
+                    <a:bodyPr wrap="square"/>
+                    <a:lstStyle/>
+                    <a:p>
+                      <a:r>
+                        <a:rPr sz="850">
+                          <a:solidFill>
+                            <a:srgbClr val="1A202C"/>
+                          </a:solidFill>
+                        </a:rPr>
+                        <a:t>A6</a:t>
+                      </a:r>
+                    </a:p>
+                  </a:txBody>
+                  <a:tcPr>
+                    <a:solidFill>
+                      <a:srgbClr val="F4F7FC"/>
+                    </a:solidFill>
+                  </a:tcPr>
+                </a:tc>
+                <a:tc>
+                  <a:txBody>
+                    <a:bodyPr wrap="square"/>
+                    <a:lstStyle/>
+                    <a:p>
+                      <a:r>
+                        <a:rPr sz="850">
+                          <a:solidFill>
+                            <a:srgbClr val="1A202C"/>
+                          </a:solidFill>
+                        </a:rPr>
+                        <a:t>接入层 JS 与 Python 规则语义一致（55 组样例 / 0 差异）；HTTP 冒烟 59 项 / 0 失败</a:t>
+                      </a:r>
+                    </a:p>
+                  </a:txBody>
+                  <a:tcPr>
+                    <a:solidFill>
+                      <a:srgbClr val="F4F7FC"/>
+                    </a:solidFill>
+                  </a:tcPr>
+                </a:tc>
+                <a:tc>
+                  <a:txBody>
+                    <a:bodyPr wrap="square"/>
+                    <a:lstStyle/>
+                    <a:p>
+                      <a:r>
+                        <a:rPr sz="850">
+                          <a:solidFill>
+                            <a:srgbClr val="1A202C"/>
+                          </a:solidFill>
+                        </a:rPr>
+                        <a:t>docs/pm-reviews/web-parity-pm-verification-2026-10-30.md（PM 独立复核）</a:t>
+                      </a:r>
+                    </a:p>
+                  </a:txBody>
+                  <a:tcPr>
+                    <a:solidFill>
+                      <a:srgbClr val="F4F7FC"/>
+                    </a:solidFill>
+                  </a:tcPr>
+                </a:tc>
+              </a:tr>
+              <a:tr h="413766">
+                <a:tc>
+                  <a:txBody>
+                    <a:bodyPr wrap="square"/>
+                    <a:lstStyle/>
+                    <a:p>
+                      <a:r>
+                        <a:rPr sz="850">
+                          <a:solidFill>
+                            <a:srgbClr val="1A202C"/>
+                          </a:solidFill>
+                        </a:rPr>
+                        <a:t>A7</a:t>
+                      </a:r>
+                    </a:p>
+                  </a:txBody>
+                  <a:tcPr>
+                    <a:solidFill>
+                      <a:srgbClr val="FFFFFF"/>
+                    </a:solidFill>
+                  </a:tcPr>
+                </a:tc>
+                <a:tc>
+                  <a:txBody>
+                    <a:bodyPr wrap="square"/>
+                    <a:lstStyle/>
+                    <a:p>
+                      <a:r>
+                        <a:rPr sz="850">
+                          <a:solidFill>
+                            <a:srgbClr val="1A202C"/>
+                          </a:solidFill>
+                        </a:rPr>
+                        <a:t>本机运行 deploy/server.py：状态码矩阵、/validate 与进程内调用逐字节一致</a:t>
+                      </a:r>
+                    </a:p>
+                  </a:txBody>
+                  <a:tcPr>
+                    <a:solidFill>
+                      <a:srgbClr val="FFFFFF"/>
+                    </a:solidFill>
+                  </a:tcPr>
+                </a:tc>
+                <a:tc>
+                  <a:txBody>
+                    <a:bodyPr wrap="square"/>
+                    <a:lstStyle/>
+                    <a:p>
+                      <a:r>
+                        <a:rPr sz="850">
+                          <a:solidFill>
+                            <a:srgbClr val="1A202C"/>
+                          </a:solidFill>
+                        </a:rPr>
+                        <a:t>deploy/evidence/20261030-local-run.md</a:t>
+                      </a:r>
+                    </a:p>
+                  </a:txBody>
+                  <a:tcPr>
+                    <a:solidFill>
+                      <a:srgbClr val="FFFFFF"/>
+                    </a:solidFill>
+                  </a:tcPr>
+                </a:tc>
+              </a:tr>
+            </a:tbl>
+          </a:graphicData>
+        </a:graphic>
+      </p:graphicFrame>
+      <p:sp>
+        <p:nvSpPr>
+          <p:cNvPr id="6" name="Rectangle 5"/>
           <p:cNvSpPr/>
           <p:nvPr/>
         </p:nvSpPr>
         <p:spPr>
           <a:xfrm>
-            <a:off x="502920" y="1325880"/>
-            <a:ext cx="5532120" cy="4800600"/>
+            <a:off x="502920" y="4663440"/>
+            <a:ext cx="5486400" cy="1572768"/>
           </a:xfrm>
           <a:prstGeom prst="rect">
             <a:avLst/>
@@ -6986,7 +7593,7 @@
           </a:fontRef>
         </p:style>
         <p:txBody>
-          <a:bodyPr rtlCol="0" anchor="ctr" wrap="square" lIns="109728" tIns="73152"/>
+          <a:bodyPr rtlCol="0" anchor="ctr" wrap="square" lIns="100584" rIns="82296" tIns="54864"/>
           <a:lstStyle/>
           <a:p>
             <a:pPr algn="ctr"/>
@@ -6996,141 +7603,51 @@
                   <a:srgbClr val="0E7C4F"/>
                 </a:solidFill>
               </a:rPr>
-              <a:t>E 已核实（有真实记录，可现场复现）</a:t>
+              <a:t>本 Agent 另行核实（真实、可复现，非 A 组口径）</a:t>
             </a:r>
           </a:p>
           <a:p>
             <a:pPr>
               <a:spcAft>
-                <a:spcPts val="300"/>
-              </a:spcAft>
-            </a:pPr>
-            <a:r>
-              <a:rPr sz="1100">
-                <a:solidFill>
-                  <a:srgbClr val="1A202C"/>
-                </a:solidFill>
-              </a:rPr>
-              <a:t>E1 单元测试：Ran 322 tests / OK</a:t>
+                <a:spcPts val="100"/>
+              </a:spcAft>
+            </a:pPr>
+            <a:r>
+              <a:rPr sz="900">
+                <a:solidFill>
+                  <a:srgbClr val="1A202C"/>
+                </a:solidFill>
+              </a:rPr>
+              <a:t>39 项阶段 C 独立套件通过（Ran 39 tests / OK）：tests/acceptance/stage_c/</a:t>
             </a:r>
           </a:p>
           <a:p>
             <a:pPr>
               <a:spcAft>
-                <a:spcPts val="300"/>
-              </a:spcAft>
-            </a:pPr>
-            <a:r>
-              <a:rPr sz="1100">
-                <a:solidFill>
-                  <a:srgbClr val="1A202C"/>
-                </a:solidFill>
-              </a:rPr>
-              <a:t>E2 阶段 C 独立套件：Ran 39 tests / OK</a:t>
-            </a:r>
-          </a:p>
-          <a:p>
-            <a:pPr>
-              <a:spcAft>
-                <a:spcPts val="300"/>
-              </a:spcAft>
-            </a:pPr>
-            <a:r>
-              <a:rPr sz="1100">
-                <a:solidFill>
-                  <a:srgbClr val="1A202C"/>
-                </a:solidFill>
-              </a:rPr>
-              <a:t>E3 46 项探针：46 passed; 0 failed; model calls: 0; cloud verified: false</a:t>
-            </a:r>
-          </a:p>
-          <a:p>
-            <a:pPr>
-              <a:spcAft>
-                <a:spcPts val="300"/>
-              </a:spcAft>
-            </a:pPr>
-            <a:r>
-              <a:rPr sz="1100">
-                <a:solidFill>
-                  <a:srgbClr val="1A202C"/>
-                </a:solidFill>
-              </a:rPr>
-              <a:t>E4 真实 Dify Cloud 沙箱 Code 节点：成功、compatible: true、0 Tokens、tool_published: false（未发布）</a:t>
-            </a:r>
-          </a:p>
-          <a:p>
-            <a:pPr>
-              <a:spcAft>
-                <a:spcPts val="300"/>
-              </a:spcAft>
-            </a:pPr>
-            <a:r>
-              <a:rPr sz="1100">
-                <a:solidFill>
-                  <a:srgbClr val="1A202C"/>
-                </a:solidFill>
-              </a:rPr>
-              <a:t>E5 校验 API 本地运行：/healthz 200，rules_source_sha256 = 4782255b…（与提交版本一致）</a:t>
-            </a:r>
-          </a:p>
-          <a:p>
-            <a:pPr>
-              <a:spcAft>
-                <a:spcPts val="300"/>
-              </a:spcAft>
-            </a:pPr>
-            <a:r>
-              <a:rPr sz="1100">
-                <a:solidFill>
-                  <a:srgbClr val="1A202C"/>
-                </a:solidFill>
-              </a:rPr>
-              <a:t>E6 失败不伪装为完成：超预算 → OVER_BUDGET、all_passed=false；损坏 JSON → 失败、无可选项</a:t>
-            </a:r>
-          </a:p>
-          <a:p>
-            <a:pPr>
-              <a:spcAft>
-                <a:spcPts val="300"/>
-              </a:spcAft>
-            </a:pPr>
-            <a:r>
-              <a:rPr sz="1100">
-                <a:solidFill>
-                  <a:srgbClr val="1A202C"/>
-                </a:solidFill>
-              </a:rPr>
-              <a:t>E7 追求对象与恋人文案实测不同：追求对象不用玫瑰、「别有负担」、「不暗示双方已确定关系」；恋人可表达亲密、允许花材</a:t>
-            </a:r>
-          </a:p>
-          <a:p>
-            <a:pPr>
-              <a:spcAft>
-                <a:spcPts val="300"/>
-              </a:spcAft>
-            </a:pPr>
-            <a:r>
-              <a:rPr sz="1100">
-                <a:solidFill>
-                  <a:srgbClr val="1A202C"/>
-                </a:solidFill>
-              </a:rPr>
-              <a:t>E8 前端接入层开发自测：pass 40 / fail 0；JS↔Python 语义比对 55 组、0 处差异</a:t>
-            </a:r>
-          </a:p>
-        </p:txBody>
-      </p:sp>
-      <p:sp>
-        <p:nvSpPr>
-          <p:cNvPr id="6" name="Rectangle 5"/>
+                <a:spcPts val="100"/>
+              </a:spcAft>
+            </a:pPr>
+            <a:r>
+              <a:rPr sz="900">
+                <a:solidFill>
+                  <a:srgbClr val="1A202C"/>
+                </a:solidFill>
+              </a:rPr>
+              <a:t>追求对象与恋人文案实测不同（规则与文案层）：不用玫瑰、「别有负担」、不暗示关系已确定</a:t>
+            </a:r>
+          </a:p>
+        </p:txBody>
+      </p:sp>
+      <p:sp>
+        <p:nvSpPr>
+          <p:cNvPr id="7" name="Rectangle 6"/>
           <p:cNvSpPr/>
           <p:nvPr/>
         </p:nvSpPr>
         <p:spPr>
           <a:xfrm>
-            <a:off x="6309360" y="1325880"/>
-            <a:ext cx="5394960" cy="4800600"/>
+            <a:off x="6217920" y="4663440"/>
+            <a:ext cx="5486400" cy="1572768"/>
           </a:xfrm>
           <a:prstGeom prst="rect">
             <a:avLst/>
@@ -7159,7 +7676,7 @@
           </a:fontRef>
         </p:style>
         <p:txBody>
-          <a:bodyPr rtlCol="0" anchor="ctr" wrap="square" lIns="109728" tIns="73152"/>
+          <a:bodyPr rtlCol="0" anchor="ctr" wrap="square" lIns="100584" rIns="82296" tIns="54864"/>
           <a:lstStyle/>
           <a:p>
             <a:pPr algn="ctr"/>
@@ -7169,141 +7686,66 @@
                   <a:srgbClr val="B42828"/>
                 </a:solidFill>
               </a:rPr>
-              <a:t>P 未核实（现场必须说「没有」）</a:t>
+              <a:t>未完成：共 17 条（B1–B4）</a:t>
             </a:r>
           </a:p>
           <a:p>
             <a:pPr>
               <a:spcAft>
-                <a:spcPts val="300"/>
-              </a:spcAft>
-            </a:pPr>
-            <a:r>
-              <a:rPr sz="1100">
-                <a:solidFill>
-                  <a:srgbClr val="1A202C"/>
-                </a:solidFill>
-              </a:rPr>
-              <a:t>P1 完整业务工作流端到端运行（草稿 2 节点 1 边、无结束节点、未接线）</a:t>
+                <a:spcPts val="100"/>
+              </a:spcAft>
+            </a:pPr>
+            <a:r>
+              <a:rPr sz="900">
+                <a:solidFill>
+                  <a:srgbClr val="1A202C"/>
+                </a:solidFill>
+              </a:rPr>
+              <a:t>B1 云与编排 4 条 ｜ B2 Dify 工作流 6 条</a:t>
             </a:r>
           </a:p>
           <a:p>
             <a:pPr>
               <a:spcAft>
-                <a:spcPts val="300"/>
-              </a:spcAft>
-            </a:pPr>
-            <a:r>
-              <a:rPr sz="1100">
-                <a:solidFill>
-                  <a:srgbClr val="1A202C"/>
-                </a:solidFill>
-              </a:rPr>
-              <a:t>P2 真实模型调用：0 次、0 Tokens（供应商未授权）</a:t>
+                <a:spcPts val="100"/>
+              </a:spcAft>
+            </a:pPr>
+            <a:r>
+              <a:rPr sz="900">
+                <a:solidFill>
+                  <a:srgbClr val="1A202C"/>
+                </a:solidFill>
+              </a:rPr>
+              <a:t>B3 数据与成本 3 条 ｜ B4 可观测性与工程 4 条</a:t>
             </a:r>
           </a:p>
           <a:p>
             <a:pPr>
               <a:spcAft>
-                <a:spcPts val="300"/>
-              </a:spcAft>
-            </a:pPr>
-            <a:r>
-              <a:rPr sz="1100">
-                <a:solidFill>
-                  <a:srgbClr val="1A202C"/>
-                </a:solidFill>
-              </a:rPr>
-              <a:t>P3 真实三候选 / 真实一次修订轨迹 / 真实持续失败路径</a:t>
-            </a:r>
-          </a:p>
-          <a:p>
-            <a:pPr>
-              <a:spcAft>
-                <a:spcPts val="300"/>
-              </a:spcAft>
-            </a:pPr>
-            <a:r>
-              <a:rPr sz="1100">
-                <a:solidFill>
-                  <a:srgbClr val="1A202C"/>
-                </a:solidFill>
-              </a:rPr>
-              <a:t>P4 业务延迟、Token 用量、调用成本：无实测（探针 0.079–0.462s 抖动，不可当业务延迟）</a:t>
-            </a:r>
-          </a:p>
-          <a:p>
-            <a:pPr>
-              <a:spcAft>
-                <a:spcPts val="300"/>
-              </a:spcAft>
-            </a:pPr>
-            <a:r>
-              <a:rPr sz="1100">
-                <a:solidFill>
-                  <a:srgbClr val="1A202C"/>
-                </a:solidFill>
-              </a:rPr>
-              <a:t>P5 真实商品价格、库存、物流：完全没有</a:t>
-            </a:r>
-          </a:p>
-          <a:p>
-            <a:pPr>
-              <a:spcAft>
-                <a:spcPts val="300"/>
-              </a:spcAft>
-            </a:pPr>
-            <a:r>
-              <a:rPr sz="1100">
-                <a:solidFill>
-                  <a:srgbClr val="1A202C"/>
-                </a:solidFill>
-              </a:rPr>
-              <a:t>P6 前端正式验收（WEB-001）：属在飞工作，未交付验收</a:t>
-            </a:r>
-          </a:p>
-          <a:p>
-            <a:pPr>
-              <a:spcAft>
-                <a:spcPts val="300"/>
-              </a:spcAft>
-            </a:pPr>
-            <a:r>
-              <a:rPr sz="1100">
-                <a:solidFill>
-                  <a:srgbClr val="1A202C"/>
-                </a:solidFill>
-              </a:rPr>
-              <a:t>P7 云部署：未部署（CLOUD-001 未开始）</a:t>
-            </a:r>
-          </a:p>
-          <a:p>
-            <a:pPr>
-              <a:spcAft>
-                <a:spcPts val="300"/>
-              </a:spcAft>
-            </a:pPr>
-            <a:r>
-              <a:rPr sz="1100">
-                <a:solidFill>
-                  <a:srgbClr val="1A202C"/>
-                </a:solidFill>
-              </a:rPr>
-              <a:t>P8 约 60 秒输入目标：无真实用户测量</a:t>
-            </a:r>
-          </a:p>
-        </p:txBody>
-      </p:sp>
-      <p:sp>
-        <p:nvSpPr>
-          <p:cNvPr id="7" name="TextBox 6"/>
+                <a:spcPts val="100"/>
+              </a:spcAft>
+            </a:pPr>
+            <a:r>
+              <a:rPr sz="900">
+                <a:solidFill>
+                  <a:srgbClr val="1A202C"/>
+                </a:solidFill>
+              </a:rPr>
+              <a:t>完整逐条口径见第 8 页；现场不合并、不概括、不美化。</a:t>
+            </a:r>
+          </a:p>
+        </p:txBody>
+      </p:sp>
+      <p:sp>
+        <p:nvSpPr>
+          <p:cNvPr id="8" name="TextBox 7"/>
           <p:cNvSpPr txBox="1"/>
           <p:nvPr/>
         </p:nvSpPr>
         <p:spPr>
           <a:xfrm>
-            <a:off x="502920" y="6419088"/>
-            <a:ext cx="11155680" cy="310896"/>
+            <a:off x="502920" y="6364224"/>
+            <a:ext cx="11201400" cy="420624"/>
           </a:xfrm>
           <a:prstGeom prst="rect">
             <a:avLst/>
@@ -7317,12 +7759,12 @@
           <a:lstStyle/>
           <a:p>
             <a:r>
-              <a:rPr sz="1000">
+              <a:rPr sz="950">
                 <a:solidFill>
                   <a:srgbClr val="606B7C"/>
                 </a:solidFill>
               </a:rPr>
-              <a:t>证据位置：docs/test-reports/stage-c/、workflow/evidence/WF-002-2026-10-30.md、README.md 复现命令总表</a:t>
+              <a:t>所有 A 组数字均可在仓库内复现；凡未取得证据的一律记「未核实 / 未发生」，不使用估算值。</a:t>
             </a:r>
           </a:p>
         </p:txBody>
@@ -7396,8 +7838,8 @@
         </p:nvSpPr>
         <p:spPr>
           <a:xfrm>
-            <a:off x="502920" y="274320"/>
-            <a:ext cx="11155680" cy="658368"/>
+            <a:off x="502920" y="219456"/>
+            <a:ext cx="11201400" cy="603504"/>
           </a:xfrm>
           <a:prstGeom prst="rect">
             <a:avLst/>
@@ -7411,7 +7853,7 @@
           <a:lstStyle/>
           <a:p>
             <a:r>
-              <a:rPr sz="2500" b="1">
+              <a:rPr sz="2400" b="1">
                 <a:solidFill>
                   <a:srgbClr val="1A202C"/>
                 </a:solidFill>
@@ -7429,8 +7871,8 @@
         </p:nvSpPr>
         <p:spPr>
           <a:xfrm>
-            <a:off x="521207" y="896112"/>
-            <a:ext cx="11155680" cy="329184"/>
+            <a:off x="521207" y="822960"/>
+            <a:ext cx="11201400" cy="365760"/>
           </a:xfrm>
           <a:prstGeom prst="rect">
             <a:avLst/>
@@ -7444,12 +7886,12 @@
           <a:lstStyle/>
           <a:p>
             <a:r>
-              <a:rPr sz="1300">
+              <a:rPr sz="1200">
                 <a:solidFill>
                   <a:srgbClr val="606B7C"/>
                 </a:solidFill>
               </a:rPr>
-              <a:t>零第三方依赖 + 哈希可追溯 + 失败不伪装</a:t>
+              <a:t>零第三方依赖 + 哈希可追溯 + 失败不伪装 + 容器逐字节一致</a:t>
             </a:r>
           </a:p>
         </p:txBody>
@@ -7462,8 +7904,8 @@
         </p:nvSpPr>
         <p:spPr>
           <a:xfrm>
-            <a:off x="502920" y="1325880"/>
-            <a:ext cx="3611880" cy="4800600"/>
+            <a:off x="502920" y="1243584"/>
+            <a:ext cx="3611880" cy="4983480"/>
           </a:xfrm>
           <a:prstGeom prst="rect">
             <a:avLst/>
@@ -7492,7 +7934,7 @@
           </a:fontRef>
         </p:style>
         <p:txBody>
-          <a:bodyPr rtlCol="0" anchor="ctr" wrap="square" lIns="109728" tIns="73152"/>
+          <a:bodyPr rtlCol="0" anchor="ctr" wrap="square" lIns="100584" rIns="82296" tIns="54864"/>
           <a:lstStyle/>
           <a:p>
             <a:pPr algn="ctr"/>
@@ -7508,11 +7950,11 @@
           <a:p>
             <a:pPr>
               <a:spcAft>
-                <a:spcPts val="300"/>
-              </a:spcAft>
-            </a:pPr>
-            <a:r>
-              <a:rPr sz="1050">
+                <a:spcPts val="100"/>
+              </a:spcAft>
+            </a:pPr>
+            <a:r>
+              <a:rPr sz="900">
                 <a:solidFill>
                   <a:srgbClr val="1A202C"/>
                 </a:solidFill>
@@ -7523,11 +7965,11 @@
           <a:p>
             <a:pPr>
               <a:spcAft>
-                <a:spcPts val="300"/>
-              </a:spcAft>
-            </a:pPr>
-            <a:r>
-              <a:rPr sz="1050">
+                <a:spcPts val="100"/>
+              </a:spcAft>
+            </a:pPr>
+            <a:r>
+              <a:rPr sz="900">
                 <a:solidFill>
                   <a:srgbClr val="1A202C"/>
                 </a:solidFill>
@@ -7538,11 +7980,11 @@
           <a:p>
             <a:pPr>
               <a:spcAft>
-                <a:spcPts val="300"/>
-              </a:spcAft>
-            </a:pPr>
-            <a:r>
-              <a:rPr sz="1050">
+                <a:spcPts val="100"/>
+              </a:spcAft>
+            </a:pPr>
+            <a:r>
+              <a:rPr sz="900">
                 <a:solidFill>
                   <a:srgbClr val="1A202C"/>
                 </a:solidFill>
@@ -7553,71 +7995,101 @@
           <a:p>
             <a:pPr>
               <a:spcAft>
-                <a:spcPts val="300"/>
-              </a:spcAft>
-            </a:pPr>
-            <a:r>
-              <a:rPr sz="1050">
-                <a:solidFill>
-                  <a:srgbClr val="1A202C"/>
-                </a:solidFill>
-              </a:rPr>
-              <a:t>生成物带 sources_sha256 / artifacts_sha256</a:t>
+                <a:spcPts val="100"/>
+              </a:spcAft>
+            </a:pPr>
+            <a:r>
+              <a:rPr sz="900">
+                <a:solidFill>
+                  <a:srgbClr val="1A202C"/>
+                </a:solidFill>
+              </a:rPr>
+              <a:t>生成物带 sources_sha256 / artifacts_sha256，逐一匹配</a:t>
             </a:r>
           </a:p>
           <a:p>
             <a:pPr>
               <a:spcAft>
-                <a:spcPts val="300"/>
-              </a:spcAft>
-            </a:pPr>
-            <a:r>
-              <a:rPr sz="1050">
-                <a:solidFill>
-                  <a:srgbClr val="1A202C"/>
-                </a:solidFill>
-              </a:rPr>
-              <a:t>哈希与实际文件逐一匹配（无 STALE）</a:t>
+                <a:spcPts val="100"/>
+              </a:spcAft>
+            </a:pPr>
+            <a:r>
+              <a:rPr sz="900">
+                <a:solidFill>
+                  <a:srgbClr val="1A202C"/>
+                </a:solidFill>
+              </a:rPr>
+              <a:t>/healthz 返回规则源码哈希，可确认现场版本</a:t>
             </a:r>
           </a:p>
           <a:p>
             <a:pPr>
               <a:spcAft>
-                <a:spcPts val="300"/>
-              </a:spcAft>
-            </a:pPr>
-            <a:r>
-              <a:rPr sz="1050">
-                <a:solidFill>
-                  <a:srgbClr val="1A202C"/>
-                </a:solidFill>
-              </a:rPr>
-              <a:t>/healthz 返回规则源码哈希，可确认现场版本</a:t>
+                <a:spcPts val="100"/>
+              </a:spcAft>
+            </a:pPr>
+            <a:r>
+              <a:rPr sz="900">
+                <a:solidFill>
+                  <a:srgbClr val="1A202C"/>
+                </a:solidFill>
+              </a:rPr>
+              <a:t>容器 /validate 与本机逐字节一致（A4）</a:t>
             </a:r>
           </a:p>
           <a:p>
             <a:pPr>
               <a:spcAft>
-                <a:spcPts val="300"/>
-              </a:spcAft>
-            </a:pPr>
-            <a:r>
-              <a:rPr sz="1050">
-                <a:solidFill>
-                  <a:srgbClr val="1A202C"/>
-                </a:solidFill>
-              </a:rPr>
-              <a:t>提交材料含版本快照 / commit</a:t>
+                <a:spcPts val="100"/>
+              </a:spcAft>
+            </a:pPr>
+            <a:r>
+              <a:rPr sz="900">
+                <a:solidFill>
+                  <a:srgbClr val="1A202C"/>
+                </a:solidFill>
+              </a:rPr>
+              <a:t>容器 /healthz 规则哈希与本机 rules.py 一致（A4）</a:t>
             </a:r>
           </a:p>
           <a:p>
             <a:pPr>
               <a:spcAft>
-                <a:spcPts val="300"/>
-              </a:spcAft>
-            </a:pPr>
-            <a:r>
-              <a:rPr sz="1050">
+                <a:spcPts val="100"/>
+              </a:spcAft>
+            </a:pPr>
+            <a:r>
+              <a:rPr sz="900">
+                <a:solidFill>
+                  <a:srgbClr val="1A202C"/>
+                </a:solidFill>
+              </a:rPr>
+              <a:t>镜像内无密钥、无 .git/tests/docs/workflow；非 root uid 10001（A5）</a:t>
+            </a:r>
+          </a:p>
+          <a:p>
+            <a:pPr>
+              <a:spcAft>
+                <a:spcPts val="100"/>
+              </a:spcAft>
+            </a:pPr>
+            <a:r>
+              <a:rPr sz="900">
+                <a:solidFill>
+                  <a:srgbClr val="1A202C"/>
+                </a:solidFill>
+              </a:rPr>
+              <a:t>deploy/server.py 状态码矩阵与进程内调用一致（A7）</a:t>
+            </a:r>
+          </a:p>
+          <a:p>
+            <a:pPr>
+              <a:spcAft>
+                <a:spcPts val="100"/>
+              </a:spcAft>
+            </a:pPr>
+            <a:r>
+              <a:rPr sz="900">
                 <a:solidFill>
                   <a:srgbClr val="1A202C"/>
                 </a:solidFill>
@@ -7628,16 +8100,16 @@
           <a:p>
             <a:pPr>
               <a:spcAft>
-                <a:spcPts val="300"/>
-              </a:spcAft>
-            </a:pPr>
-            <a:r>
-              <a:rPr sz="1050">
-                <a:solidFill>
-                  <a:srgbClr val="1A202C"/>
-                </a:solidFill>
-              </a:rPr>
-              <a:t>P 未完成：Docker 未构建、未做云部署</a:t>
+                <a:spcPts val="100"/>
+              </a:spcAft>
+            </a:pPr>
+            <a:r>
+              <a:rPr sz="900">
+                <a:solidFill>
+                  <a:srgbClr val="1A202C"/>
+                </a:solidFill>
+              </a:rPr>
+              <a:t>B 未完成：镜像未推仓库、未上云</a:t>
             </a:r>
           </a:p>
         </p:txBody>
@@ -7650,8 +8122,8 @@
         </p:nvSpPr>
         <p:spPr>
           <a:xfrm>
-            <a:off x="4279392" y="1325880"/>
-            <a:ext cx="3611880" cy="4800600"/>
+            <a:off x="4279392" y="1243584"/>
+            <a:ext cx="3611880" cy="4983480"/>
           </a:xfrm>
           <a:prstGeom prst="rect">
             <a:avLst/>
@@ -7680,7 +8152,7 @@
           </a:fontRef>
         </p:style>
         <p:txBody>
-          <a:bodyPr rtlCol="0" anchor="ctr" wrap="square" lIns="109728" tIns="73152"/>
+          <a:bodyPr rtlCol="0" anchor="ctr" wrap="square" lIns="100584" rIns="82296" tIns="54864"/>
           <a:lstStyle/>
           <a:p>
             <a:pPr algn="ctr"/>
@@ -7696,56 +8168,56 @@
           <a:p>
             <a:pPr>
               <a:spcAft>
-                <a:spcPts val="300"/>
-              </a:spcAft>
-            </a:pPr>
-            <a:r>
-              <a:rPr sz="1050">
-                <a:solidFill>
-                  <a:srgbClr val="1A202C"/>
-                </a:solidFill>
-              </a:rPr>
-              <a:t>模型输出非法 JSON：判为可修订 → 最多一次 → 仍失败如实失败</a:t>
+                <a:spcPts val="100"/>
+              </a:spcAft>
+            </a:pPr>
+            <a:r>
+              <a:rPr sz="900">
+                <a:solidFill>
+                  <a:srgbClr val="1A202C"/>
+                </a:solidFill>
+              </a:rPr>
+              <a:t>模型输出损坏 JSON：真实被判可修订 → 一次修订 → 重检通过（case4）</a:t>
             </a:r>
           </a:p>
           <a:p>
             <a:pPr>
               <a:spcAft>
-                <a:spcPts val="300"/>
-              </a:spcAft>
-            </a:pPr>
-            <a:r>
-              <a:rPr sz="1050">
-                <a:solidFill>
-                  <a:srgbClr val="1A202C"/>
-                </a:solidFill>
-              </a:rPr>
-              <a:t>硬约束不满足：失败项不可选，可选项由 selectable_candidate_ids 决定</a:t>
+                <a:spcPts val="100"/>
+              </a:spcAft>
+            </a:pPr>
+            <a:r>
+              <a:rPr sz="900">
+                <a:solidFill>
+                  <a:srgbClr val="1A202C"/>
+                </a:solidFill>
+              </a:rPr>
+              <a:t>持续失败：真实复现 all_passed=false、repairable=false，如实失败（case5）</a:t>
             </a:r>
           </a:p>
           <a:p>
             <a:pPr>
               <a:spcAft>
-                <a:spcPts val="300"/>
-              </a:spcAft>
-            </a:pPr>
-            <a:r>
-              <a:rPr sz="1050">
-                <a:solidFill>
-                  <a:srgbClr val="1A202C"/>
-                </a:solidFill>
-              </a:rPr>
-              <a:t>修订额度用尽：保留真实失败结果并提示</a:t>
+                <a:spcPts val="100"/>
+              </a:spcAft>
+            </a:pPr>
+            <a:r>
+              <a:rPr sz="900">
+                <a:solidFill>
+                  <a:srgbClr val="1A202C"/>
+                </a:solidFill>
+              </a:rPr>
+              <a:t>硬约束不满足：失败项不可选（首次错误码均为 FORBIDDEN_TERM）</a:t>
             </a:r>
           </a:p>
           <a:p>
             <a:pPr>
               <a:spcAft>
-                <a:spcPts val="300"/>
-              </a:spcAft>
-            </a:pPr>
-            <a:r>
-              <a:rPr sz="1050">
+                <a:spcPts val="100"/>
+              </a:spcAft>
+            </a:pPr>
+            <a:r>
+              <a:rPr sz="900">
                 <a:solidFill>
                   <a:srgbClr val="1A202C"/>
                 </a:solidFill>
@@ -7756,41 +8228,41 @@
           <a:p>
             <a:pPr>
               <a:spcAft>
-                <a:spcPts val="300"/>
-              </a:spcAft>
-            </a:pPr>
-            <a:r>
-              <a:rPr sz="1050">
-                <a:solidFill>
-                  <a:srgbClr val="1A202C"/>
-                </a:solidFill>
-              </a:rPr>
-              <a:t>伪造 / 越界候选：服务端按运行 ID + 候选版本校验</a:t>
+                <a:spcPts val="100"/>
+              </a:spcAft>
+            </a:pPr>
+            <a:r>
+              <a:rPr sz="900">
+                <a:solidFill>
+                  <a:srgbClr val="1A202C"/>
+                </a:solidFill>
+              </a:rPr>
+              <a:t>伪造/越界候选：服务端按运行 ID + 候选版本校验</a:t>
             </a:r>
           </a:p>
           <a:p>
             <a:pPr>
               <a:spcAft>
-                <a:spcPts val="300"/>
-              </a:spcAft>
-            </a:pPr>
-            <a:r>
-              <a:rPr sz="1050">
-                <a:solidFill>
-                  <a:srgbClr val="1A202C"/>
-                </a:solidFill>
-              </a:rPr>
-              <a:t>工具失败 / 超时：中文提示，不做重试风暴</a:t>
+                <a:spcPts val="100"/>
+              </a:spcAft>
+            </a:pPr>
+            <a:r>
+              <a:rPr sz="900">
+                <a:solidFill>
+                  <a:srgbClr val="1A202C"/>
+                </a:solidFill>
+              </a:rPr>
+              <a:t>容器错误路径：非法 JSON / 类型错误 / 未知路径 / 无 Content-Length / 超长体 全部符合契约</a:t>
             </a:r>
           </a:p>
           <a:p>
             <a:pPr>
               <a:spcAft>
-                <a:spcPts val="300"/>
-              </a:spcAft>
-            </a:pPr>
-            <a:r>
-              <a:rPr sz="1050">
+                <a:spcPts val="100"/>
+              </a:spcAft>
+            </a:pPr>
+            <a:r>
+              <a:rPr sz="900">
                 <a:solidFill>
                   <a:srgbClr val="1A202C"/>
                 </a:solidFill>
@@ -7801,16 +8273,46 @@
           <a:p>
             <a:pPr>
               <a:spcAft>
-                <a:spcPts val="300"/>
-              </a:spcAft>
-            </a:pPr>
-            <a:r>
-              <a:rPr sz="1050">
-                <a:solidFill>
-                  <a:srgbClr val="1A202C"/>
-                </a:solidFill>
-              </a:rPr>
-              <a:t>P 未完成：异常处理说明未独立成文（G-3）</a:t>
+                <a:spcPts val="100"/>
+              </a:spcAft>
+            </a:pPr>
+            <a:r>
+              <a:rPr sz="900">
+                <a:solidFill>
+                  <a:srgbClr val="1A202C"/>
+                </a:solidFill>
+              </a:rPr>
+              <a:t>B 未完成：</a:t>
+            </a:r>
+          </a:p>
+          <a:p>
+            <a:pPr>
+              <a:spcAft>
+                <a:spcPts val="100"/>
+              </a:spcAft>
+            </a:pPr>
+            <a:r>
+              <a:rPr sz="900">
+                <a:solidFill>
+                  <a:srgbClr val="1A202C"/>
+                </a:solidFill>
+              </a:rPr>
+              <a:t>B9 提示词修复之后的修订→再校验路径无运行时证据</a:t>
+            </a:r>
+          </a:p>
+          <a:p>
+            <a:pPr>
+              <a:spcAft>
+                <a:spcPts val="100"/>
+              </a:spcAft>
+            </a:pPr>
+            <a:r>
+              <a:rPr sz="900">
+                <a:solidFill>
+                  <a:srgbClr val="1A202C"/>
+                </a:solidFill>
+              </a:rPr>
+              <a:t>异常处理独立成文（G-3）仍缺</a:t>
             </a:r>
           </a:p>
         </p:txBody>
@@ -7823,8 +8325,8 @@
         </p:nvSpPr>
         <p:spPr>
           <a:xfrm>
-            <a:off x="8065008" y="1325880"/>
-            <a:ext cx="3611880" cy="4800600"/>
+            <a:off x="8065008" y="1243584"/>
+            <a:ext cx="3639312" cy="4983480"/>
           </a:xfrm>
           <a:prstGeom prst="rect">
             <a:avLst/>
@@ -7853,7 +8355,7 @@
           </a:fontRef>
         </p:style>
         <p:txBody>
-          <a:bodyPr rtlCol="0" anchor="ctr" wrap="square" lIns="109728" tIns="73152"/>
+          <a:bodyPr rtlCol="0" anchor="ctr" wrap="square" lIns="100584" rIns="82296" tIns="54864"/>
           <a:lstStyle/>
           <a:p>
             <a:pPr algn="ctr"/>
@@ -7869,106 +8371,166 @@
           <a:p>
             <a:pPr>
               <a:spcAft>
-                <a:spcPts val="300"/>
-              </a:spcAft>
-            </a:pPr>
-            <a:r>
-              <a:rPr sz="1050">
-                <a:solidFill>
-                  <a:srgbClr val="1A202C"/>
-                </a:solidFill>
-              </a:rPr>
-              <a:t>服务端持有：运行 ID、候选版本、两次校验输出</a:t>
+                <a:spcPts val="100"/>
+              </a:spcAft>
+            </a:pPr>
+            <a:r>
+              <a:rPr sz="900">
+                <a:solidFill>
+                  <a:srgbClr val="1A202C"/>
+                </a:solidFill>
+              </a:rPr>
+              <a:t>服务端持有：运行 ID、候选版本、两次校验输出、修订计数、错误码、调用计数</a:t>
             </a:r>
           </a:p>
           <a:p>
             <a:pPr>
               <a:spcAft>
-                <a:spcPts val="300"/>
-              </a:spcAft>
-            </a:pPr>
-            <a:r>
-              <a:rPr sz="1050">
-                <a:solidFill>
-                  <a:srgbClr val="1A202C"/>
-                </a:solidFill>
-              </a:rPr>
-              <a:t>全局修订计数、错误码、调用计数</a:t>
+                <a:spcPts val="100"/>
+              </a:spcAft>
+            </a:pPr>
+            <a:r>
+              <a:rPr sz="900">
+                <a:solidFill>
+                  <a:srgbClr val="1A202C"/>
+                </a:solidFill>
+              </a:rPr>
+              <a:t>token 取服务端 workflow_finished.total_tokens（34,127）</a:t>
             </a:r>
           </a:p>
           <a:p>
             <a:pPr>
               <a:spcAft>
-                <a:spcPts val="300"/>
-              </a:spcAft>
-            </a:pPr>
-            <a:r>
-              <a:rPr sz="1050">
-                <a:solidFill>
-                  <a:srgbClr val="1A202C"/>
-                </a:solidFill>
-              </a:rPr>
-              <a:t>模型调用次数记 model_calls</a:t>
+                <a:spcPts val="100"/>
+              </a:spcAft>
+            </a:pPr>
+            <a:r>
+              <a:rPr sz="900">
+                <a:solidFill>
+                  <a:srgbClr val="1A202C"/>
+                </a:solidFill>
+              </a:rPr>
+              <a:t>接入层语义一致 55 组 / 0 差异；HTTP 冒烟 59 项 / 0 失败（A6）</a:t>
             </a:r>
           </a:p>
           <a:p>
             <a:pPr>
               <a:spcAft>
-                <a:spcPts val="300"/>
-              </a:spcAft>
-            </a:pPr>
-            <a:r>
-              <a:rPr sz="1050">
-                <a:solidFill>
-                  <a:srgbClr val="1A202C"/>
-                </a:solidFill>
-              </a:rPr>
-              <a:t>成本缺数据记 not_measured，不填 0</a:t>
+                <a:spcPts val="100"/>
+              </a:spcAft>
+            </a:pPr>
+            <a:r>
+              <a:rPr sz="900">
+                <a:solidFill>
+                  <a:srgbClr val="1A202C"/>
+                </a:solidFill>
+              </a:rPr>
+              <a:t/>
             </a:r>
           </a:p>
           <a:p>
             <a:pPr>
               <a:spcAft>
-                <a:spcPts val="300"/>
-              </a:spcAft>
-            </a:pPr>
-            <a:r>
-              <a:rPr sz="1050">
-                <a:solidFill>
-                  <a:srgbClr val="1A202C"/>
-                </a:solidFill>
-              </a:rPr>
-              <a:t>Dify 自动保存延迟风险已记录：以服务端实读为准，不以界面显示为证据</a:t>
+                <a:spcPts val="100"/>
+              </a:spcAft>
+            </a:pPr>
+            <a:r>
+              <a:rPr sz="900">
+                <a:solidFill>
+                  <a:srgbClr val="1A202C"/>
+                </a:solidFill>
+              </a:rPr>
+              <a:t>B 未完成：</a:t>
             </a:r>
           </a:p>
           <a:p>
             <a:pPr>
               <a:spcAft>
-                <a:spcPts val="300"/>
-              </a:spcAft>
-            </a:pPr>
-            <a:r>
-              <a:rPr sz="1050">
-                <a:solidFill>
-                  <a:srgbClr val="1A202C"/>
-                </a:solidFill>
-              </a:rPr>
-              <a:t/>
+                <a:spcPts val="100"/>
+              </a:spcAft>
+            </a:pPr>
+            <a:r>
+              <a:rPr sz="900">
+                <a:solidFill>
+                  <a:srgbClr val="1A202C"/>
+                </a:solidFill>
+              </a:rPr>
+              <a:t>B6 平台级 trace 不可用（not_collected），无平台侧调用链</a:t>
             </a:r>
           </a:p>
           <a:p>
             <a:pPr>
               <a:spcAft>
-                <a:spcPts val="300"/>
-              </a:spcAft>
-            </a:pPr>
-            <a:r>
-              <a:rPr sz="1050">
-                <a:solidFill>
-                  <a:srgbClr val="1A202C"/>
-                </a:solidFill>
-              </a:rPr>
-              <a:t>P 缺口：Dify 租户未启用 trace 采集（not_collected），无平台级调用轨迹（G-2）</a:t>
+                <a:spcPts val="100"/>
+              </a:spcAft>
+            </a:pPr>
+            <a:r>
+              <a:rPr sz="900">
+                <a:solidFill>
+                  <a:srgbClr val="1A202C"/>
+                </a:solidFill>
+              </a:rPr>
+              <a:t>B14 阶段 14 采集方案仍是设计</a:t>
+            </a:r>
+          </a:p>
+          <a:p>
+            <a:pPr>
+              <a:spcAft>
+                <a:spcPts val="100"/>
+              </a:spcAft>
+            </a:pPr>
+            <a:r>
+              <a:rPr sz="900">
+                <a:solidFill>
+                  <a:srgbClr val="1A202C"/>
+                </a:solidFill>
+              </a:rPr>
+              <a:t>B15 web/ 无性能数据；未在真实浏览器验证渲染与交互</a:t>
+            </a:r>
+          </a:p>
+          <a:p>
+            <a:pPr>
+              <a:spcAft>
+                <a:spcPts val="100"/>
+              </a:spcAft>
+            </a:pPr>
+            <a:r>
+              <a:rPr sz="900">
+                <a:solidFill>
+                  <a:srgbClr val="1A202C"/>
+                </a:solidFill>
+              </a:rPr>
+              <a:t>B16 parity 仅样例级等价，无安全专项测试（注入/越权/限流）</a:t>
+            </a:r>
+          </a:p>
+          <a:p>
+            <a:pPr>
+              <a:spcAft>
+                <a:spcPts val="100"/>
+              </a:spcAft>
+            </a:pPr>
+            <a:r>
+              <a:rPr sz="900">
+                <a:solidFill>
+                  <a:srgbClr val="1A202C"/>
+                </a:solidFill>
+              </a:rPr>
+              <a:t>B17 提交为临时提交，尚未经过独立评审（PM 工具不入库）</a:t>
+            </a:r>
+          </a:p>
+          <a:p>
+            <a:pPr>
+              <a:spcAft>
+                <a:spcPts val="100"/>
+              </a:spcAft>
+            </a:pPr>
+            <a:r>
+              <a:rPr sz="900">
+                <a:solidFill>
+                  <a:srgbClr val="1A202C"/>
+                </a:solidFill>
+              </a:rPr>
+              <a:t>B12 DeepSeek 单价未从真实账单核实</a:t>
             </a:r>
           </a:p>
         </p:txBody>
@@ -7981,8 +8543,8 @@
         </p:nvSpPr>
         <p:spPr>
           <a:xfrm>
-            <a:off x="502920" y="6419088"/>
-            <a:ext cx="11155680" cy="310896"/>
+            <a:off x="502920" y="6364224"/>
+            <a:ext cx="11201400" cy="420624"/>
           </a:xfrm>
           <a:prstGeom prst="rect">
             <a:avLst/>
@@ -7996,12 +8558,12 @@
           <a:lstStyle/>
           <a:p>
             <a:r>
-              <a:rPr sz="1000">
+              <a:rPr sz="950">
                 <a:solidFill>
                   <a:srgbClr val="606B7C"/>
                 </a:solidFill>
               </a:rPr>
-              <a:t>异常处理与可观测性是赛道 B 的独立材料要求（评分规则 1.2）；本页同时列出已实现项与缺口。</a:t>
+              <a:t>异常处理与可观测性是赛道 B 独立材料要求（评分规则 1.2）；本页同时列出已实测项与未完成项。</a:t>
             </a:r>
           </a:p>
         </p:txBody>
@@ -8075,8 +8637,8 @@
         </p:nvSpPr>
         <p:spPr>
           <a:xfrm>
-            <a:off x="502920" y="274320"/>
-            <a:ext cx="11155680" cy="658368"/>
+            <a:off x="502920" y="219456"/>
+            <a:ext cx="11201400" cy="603504"/>
           </a:xfrm>
           <a:prstGeom prst="rect">
             <a:avLst/>
@@ -8090,7 +8652,7 @@
           <a:lstStyle/>
           <a:p>
             <a:r>
-              <a:rPr sz="2500" b="1">
+              <a:rPr sz="2400" b="1">
                 <a:solidFill>
                   <a:srgbClr val="1A202C"/>
                 </a:solidFill>
@@ -8108,8 +8670,8 @@
         </p:nvSpPr>
         <p:spPr>
           <a:xfrm>
-            <a:off x="521207" y="896112"/>
-            <a:ext cx="11155680" cy="329184"/>
+            <a:off x="521207" y="822960"/>
+            <a:ext cx="11201400" cy="365760"/>
           </a:xfrm>
           <a:prstGeom prst="rect">
             <a:avLst/>
@@ -8123,12 +8685,12 @@
           <a:lstStyle/>
           <a:p>
             <a:r>
-              <a:rPr sz="1300">
+              <a:rPr sz="1200">
                 <a:solidFill>
                   <a:srgbClr val="606B7C"/>
                 </a:solidFill>
               </a:rPr>
-              <a:t>只讲有数据支撑的；没有数据就记「未测量」，不填 0</a:t>
+              <a:t>只用真实实测数字；单位价格未取得真实账单前一律写「未核实」</a:t>
             </a:r>
           </a:p>
         </p:txBody>
@@ -8142,8 +8704,8 @@
           <p:nvPr/>
         </p:nvGraphicFramePr>
         <p:xfrm>
-          <a:off x="502920" y="1325880"/>
-          <a:ext cx="5760719" cy="3200400"/>
+          <a:off x="502920" y="1225296"/>
+          <a:ext cx="7040878" cy="3931920"/>
         </p:xfrm>
         <a:graphic>
           <a:graphicData uri="http://schemas.openxmlformats.org/drawingml/2006/table">
@@ -8152,18 +8714,18 @@
                 <a:tableStyleId>{5C22544A-7EE6-4342-B048-85BDC9FD1C3A}</a:tableStyleId>
               </a:tblPr>
               <a:tblGrid>
-                <a:gridCol w="1470822"/>
-                <a:gridCol w="1593390"/>
-                <a:gridCol w="2696507"/>
+                <a:gridCol w="2237288"/>
+                <a:gridCol w="1908275"/>
+                <a:gridCol w="2895315"/>
               </a:tblGrid>
-              <a:tr h="457200">
-                <a:tc>
-                  <a:txBody>
-                    <a:bodyPr wrap="square"/>
-                    <a:lstStyle/>
-                    <a:p>
-                      <a:r>
-                        <a:rPr sz="950" b="1">
+              <a:tr h="280851">
+                <a:tc>
+                  <a:txBody>
+                    <a:bodyPr wrap="square"/>
+                    <a:lstStyle/>
+                    <a:p>
+                      <a:r>
+                        <a:rPr sz="800" b="1">
                           <a:solidFill>
                             <a:srgbClr val="FFFFFF"/>
                           </a:solidFill>
@@ -8184,7 +8746,7 @@
                     <a:lstStyle/>
                     <a:p>
                       <a:r>
-                        <a:rPr sz="950" b="1">
+                        <a:rPr sz="800" b="1">
                           <a:solidFill>
                             <a:srgbClr val="FFFFFF"/>
                           </a:solidFill>
@@ -8205,12 +8767,12 @@
                     <a:lstStyle/>
                     <a:p>
                       <a:r>
-                        <a:rPr sz="950" b="1">
+                        <a:rPr sz="800" b="1">
                           <a:solidFill>
                             <a:srgbClr val="FFFFFF"/>
                           </a:solidFill>
                         </a:rPr>
-                        <a:t>说明</a:t>
+                        <a:t>条件 / 说明</a:t>
                       </a:r>
                     </a:p>
                   </a:txBody>
@@ -8221,14 +8783,14 @@
                   </a:tcPr>
                 </a:tc>
               </a:tr>
-              <a:tr h="457200">
-                <a:tc>
-                  <a:txBody>
-                    <a:bodyPr wrap="square"/>
-                    <a:lstStyle/>
-                    <a:p>
-                      <a:r>
-                        <a:rPr sz="950">
+              <a:tr h="280851">
+                <a:tc>
+                  <a:txBody>
+                    <a:bodyPr wrap="square"/>
+                    <a:lstStyle/>
+                    <a:p>
+                      <a:r>
+                        <a:rPr sz="800">
                           <a:solidFill>
                             <a:srgbClr val="1A202C"/>
                           </a:solidFill>
@@ -8249,12 +8811,12 @@
                     <a:lstStyle/>
                     <a:p>
                       <a:r>
-                        <a:rPr sz="950">
+                        <a:rPr sz="800">
                           <a:solidFill>
                             <a:srgbClr val="1A202C"/>
                           </a:solidFill>
                         </a:rPr>
-                        <a:t>0</a:t>
+                        <a:t>10 次</a:t>
                       </a:r>
                     </a:p>
                   </a:txBody>
@@ -8270,12 +8832,12 @@
                     <a:lstStyle/>
                     <a:p>
                       <a:r>
-                        <a:rPr sz="950">
+                        <a:rPr sz="800">
                           <a:solidFill>
                             <a:srgbClr val="1A202C"/>
                           </a:solidFill>
                         </a:rPr>
-                        <a:t>全程未调用模型（供应商未授权）</a:t>
+                        <a:t>真实 DeepSeek（N2 生成 + N5 修订）</a:t>
                       </a:r>
                     </a:p>
                   </a:txBody>
@@ -8286,14 +8848,14 @@
                   </a:tcPr>
                 </a:tc>
               </a:tr>
-              <a:tr h="457200">
-                <a:tc>
-                  <a:txBody>
-                    <a:bodyPr wrap="square"/>
-                    <a:lstStyle/>
-                    <a:p>
-                      <a:r>
-                        <a:rPr sz="950">
+              <a:tr h="280851">
+                <a:tc>
+                  <a:txBody>
+                    <a:bodyPr wrap="square"/>
+                    <a:lstStyle/>
+                    <a:p>
+                      <a:r>
+                        <a:rPr sz="800">
                           <a:solidFill>
                             <a:srgbClr val="1A202C"/>
                           </a:solidFill>
@@ -8314,12 +8876,12 @@
                     <a:lstStyle/>
                     <a:p>
                       <a:r>
-                        <a:rPr sz="950">
+                        <a:rPr sz="800">
                           <a:solidFill>
                             <a:srgbClr val="1A202C"/>
                           </a:solidFill>
                         </a:rPr>
-                        <a:t>0 Tokens</a:t>
+                        <a:t>34,127 tokens</a:t>
                       </a:r>
                     </a:p>
                   </a:txBody>
@@ -8335,12 +8897,12 @@
                     <a:lstStyle/>
                     <a:p>
                       <a:r>
-                        <a:rPr sz="950">
+                        <a:rPr sz="800">
                           <a:solidFill>
                             <a:srgbClr val="1A202C"/>
                           </a:solidFill>
                         </a:rPr>
-                        <a:t>真实 Dify 沙箱 Code 节点运行结果</a:t>
+                        <a:t>服务端 workflow_finished.total_tokens 累加</a:t>
                       </a:r>
                     </a:p>
                   </a:txBody>
@@ -8351,19 +8913,19 @@
                   </a:tcPr>
                 </a:tc>
               </a:tr>
-              <a:tr h="457200">
-                <a:tc>
-                  <a:txBody>
-                    <a:bodyPr wrap="square"/>
-                    <a:lstStyle/>
-                    <a:p>
-                      <a:r>
-                        <a:rPr sz="950">
+              <a:tr h="280851">
+                <a:tc>
+                  <a:txBody>
+                    <a:bodyPr wrap="square"/>
+                    <a:lstStyle/>
+                    <a:p>
+                      <a:r>
+                        <a:rPr sz="800">
                           <a:solidFill>
                             <a:srgbClr val="1A202C"/>
                           </a:solidFill>
                         </a:rPr>
-                        <a:t>端到端业务延迟</a:t>
+                        <a:t>N2 真实生成耗时</a:t>
                       </a:r>
                     </a:p>
                   </a:txBody>
@@ -8379,12 +8941,12 @@
                     <a:lstStyle/>
                     <a:p>
                       <a:r>
-                        <a:rPr sz="950">
+                        <a:rPr sz="800">
                           <a:solidFill>
                             <a:srgbClr val="1A202C"/>
                           </a:solidFill>
                         </a:rPr>
-                        <a:t>无实测</a:t>
+                        <a:t>约 4.5–6.0 s</a:t>
                       </a:r>
                     </a:p>
                   </a:txBody>
@@ -8400,12 +8962,12 @@
                     <a:lstStyle/>
                     <a:p>
                       <a:r>
-                        <a:rPr sz="950">
+                        <a:rPr sz="800">
                           <a:solidFill>
                             <a:srgbClr val="1A202C"/>
                           </a:solidFill>
                         </a:rPr>
-                        <a:t>探针 0.079/0.094/0.462s 为无模型抖动值</a:t>
+                        <a:t>含模型；R1 实测 6.01 s</a:t>
                       </a:r>
                     </a:p>
                   </a:txBody>
@@ -8416,19 +8978,19 @@
                   </a:tcPr>
                 </a:tc>
               </a:tr>
-              <a:tr h="457200">
-                <a:tc>
-                  <a:txBody>
-                    <a:bodyPr wrap="square"/>
-                    <a:lstStyle/>
-                    <a:p>
-                      <a:r>
-                        <a:rPr sz="950">
+              <a:tr h="280851">
+                <a:tc>
+                  <a:txBody>
+                    <a:bodyPr wrap="square"/>
+                    <a:lstStyle/>
+                    <a:p>
+                      <a:r>
+                        <a:rPr sz="800">
                           <a:solidFill>
                             <a:srgbClr val="1A202C"/>
                           </a:solidFill>
                         </a:rPr>
-                        <a:t>调用成本</a:t>
+                        <a:t>N5 真实修订耗时</a:t>
                       </a:r>
                     </a:p>
                   </a:txBody>
@@ -8444,12 +9006,12 @@
                     <a:lstStyle/>
                     <a:p>
                       <a:r>
-                        <a:rPr sz="950">
+                        <a:rPr sz="800">
                           <a:solidFill>
                             <a:srgbClr val="1A202C"/>
                           </a:solidFill>
                         </a:rPr>
-                        <a:t>not_measured</a:t>
+                        <a:t>约 3.0–3.1 s</a:t>
                       </a:r>
                     </a:p>
                   </a:txBody>
@@ -8465,12 +9027,12 @@
                     <a:lstStyle/>
                     <a:p>
                       <a:r>
-                        <a:rPr sz="950">
+                        <a:rPr sz="800">
                           <a:solidFill>
                             <a:srgbClr val="1A202C"/>
                           </a:solidFill>
                         </a:rPr>
-                        <a:t>无计费即无费率依据，缺数据记未知</a:t>
+                        <a:t>含模型</a:t>
                       </a:r>
                     </a:p>
                   </a:txBody>
@@ -8481,19 +9043,19 @@
                   </a:tcPr>
                 </a:tc>
               </a:tr>
-              <a:tr h="457200">
-                <a:tc>
-                  <a:txBody>
-                    <a:bodyPr wrap="square"/>
-                    <a:lstStyle/>
-                    <a:p>
-                      <a:r>
-                        <a:rPr sz="950">
+              <a:tr h="280851">
+                <a:tc>
+                  <a:txBody>
+                    <a:bodyPr wrap="square"/>
+                    <a:lstStyle/>
+                    <a:p>
+                      <a:r>
+                        <a:rPr sz="800">
                           <a:solidFill>
                             <a:srgbClr val="1A202C"/>
                           </a:solidFill>
                         </a:rPr>
-                        <a:t>本地测试耗时</a:t>
+                        <a:t>端到端（含 7 个 Code 节点）</a:t>
                       </a:r>
                     </a:p>
                   </a:txBody>
@@ -8509,12 +9071,12 @@
                     <a:lstStyle/>
                     <a:p>
                       <a:r>
-                        <a:rPr sz="950">
+                        <a:rPr sz="800">
                           <a:solidFill>
                             <a:srgbClr val="1A202C"/>
                           </a:solidFill>
                         </a:rPr>
-                        <a:t>322 项 0.163s；39 项 0.126s</a:t>
+                        <a:t>5.2–8.9 s</a:t>
                       </a:r>
                     </a:p>
                   </a:txBody>
@@ -8530,12 +9092,12 @@
                     <a:lstStyle/>
                     <a:p>
                       <a:r>
-                        <a:rPr sz="950">
+                        <a:rPr sz="800">
                           <a:solidFill>
                             <a:srgbClr val="1A202C"/>
                           </a:solidFill>
                         </a:rPr>
-                        <a:t>固定快照、离线</a:t>
+                        <a:t>含模型；单样本</a:t>
                       </a:r>
                     </a:p>
                   </a:txBody>
@@ -8546,19 +9108,19 @@
                   </a:tcPr>
                 </a:tc>
               </a:tr>
-              <a:tr h="457200">
-                <a:tc>
-                  <a:txBody>
-                    <a:bodyPr wrap="square"/>
-                    <a:lstStyle/>
-                    <a:p>
-                      <a:r>
-                        <a:rPr sz="950">
+              <a:tr h="280851">
+                <a:tc>
+                  <a:txBody>
+                    <a:bodyPr wrap="square"/>
+                    <a:lstStyle/>
+                    <a:p>
+                      <a:r>
+                        <a:rPr sz="800">
                           <a:solidFill>
                             <a:srgbClr val="1A202C"/>
                           </a:solidFill>
                         </a:rPr>
-                        <a:t>云资源消耗</a:t>
+                        <a:t>工作流服务端耗时</a:t>
                       </a:r>
                     </a:p>
                   </a:txBody>
@@ -8574,12 +9136,12 @@
                     <a:lstStyle/>
                     <a:p>
                       <a:r>
-                        <a:rPr sz="950">
+                        <a:rPr sz="800">
                           <a:solidFill>
                             <a:srgbClr val="1A202C"/>
                           </a:solidFill>
                         </a:rPr>
-                        <a:t>无</a:t>
+                        <a:t>0.587–0.888 s</a:t>
                       </a:r>
                     </a:p>
                   </a:txBody>
@@ -8595,18 +9157,473 @@
                     <a:lstStyle/>
                     <a:p>
                       <a:r>
-                        <a:rPr sz="950">
+                        <a:rPr sz="800">
                           <a:solidFill>
                             <a:srgbClr val="1A202C"/>
                           </a:solidFill>
                         </a:rPr>
-                        <a:t>未部署、未开通、未付费</a:t>
+                        <a:t>占位期、无模型，5 用例</a:t>
                       </a:r>
                     </a:p>
                   </a:txBody>
                   <a:tcPr>
                     <a:solidFill>
                       <a:srgbClr val="F4F7FC"/>
+                    </a:solidFill>
+                  </a:tcPr>
+                </a:tc>
+              </a:tr>
+              <a:tr h="280851">
+                <a:tc>
+                  <a:txBody>
+                    <a:bodyPr wrap="square"/>
+                    <a:lstStyle/>
+                    <a:p>
+                      <a:r>
+                        <a:rPr sz="800">
+                          <a:solidFill>
+                            <a:srgbClr val="1A202C"/>
+                          </a:solidFill>
+                        </a:rPr>
+                        <a:t>代码节点耗时</a:t>
+                      </a:r>
+                    </a:p>
+                  </a:txBody>
+                  <a:tcPr>
+                    <a:solidFill>
+                      <a:srgbClr val="FFFFFF"/>
+                    </a:solidFill>
+                  </a:tcPr>
+                </a:tc>
+                <a:tc>
+                  <a:txBody>
+                    <a:bodyPr wrap="square"/>
+                    <a:lstStyle/>
+                    <a:p>
+                      <a:r>
+                        <a:rPr sz="800">
+                          <a:solidFill>
+                            <a:srgbClr val="1A202C"/>
+                          </a:solidFill>
+                        </a:rPr>
+                        <a:t>0.067–0.238 s</a:t>
+                      </a:r>
+                    </a:p>
+                  </a:txBody>
+                  <a:tcPr>
+                    <a:solidFill>
+                      <a:srgbClr val="FFFFFF"/>
+                    </a:solidFill>
+                  </a:tcPr>
+                </a:tc>
+                <a:tc>
+                  <a:txBody>
+                    <a:bodyPr wrap="square"/>
+                    <a:lstStyle/>
+                    <a:p>
+                      <a:r>
+                        <a:rPr sz="800">
+                          <a:solidFill>
+                            <a:srgbClr val="1A202C"/>
+                          </a:solidFill>
+                        </a:rPr>
+                        <a:t>N1，5 次</a:t>
+                      </a:r>
+                    </a:p>
+                  </a:txBody>
+                  <a:tcPr>
+                    <a:solidFill>
+                      <a:srgbClr val="FFFFFF"/>
+                    </a:solidFill>
+                  </a:tcPr>
+                </a:tc>
+              </a:tr>
+              <a:tr h="280851">
+                <a:tc>
+                  <a:txBody>
+                    <a:bodyPr wrap="square"/>
+                    <a:lstStyle/>
+                    <a:p>
+                      <a:r>
+                        <a:rPr sz="800">
+                          <a:solidFill>
+                            <a:srgbClr val="1A202C"/>
+                          </a:solidFill>
+                        </a:rPr>
+                        <a:t>容器：镜像 / 构建</a:t>
+                      </a:r>
+                    </a:p>
+                  </a:txBody>
+                  <a:tcPr>
+                    <a:solidFill>
+                      <a:srgbClr val="F4F7FC"/>
+                    </a:solidFill>
+                  </a:tcPr>
+                </a:tc>
+                <a:tc>
+                  <a:txBody>
+                    <a:bodyPr wrap="square"/>
+                    <a:lstStyle/>
+                    <a:p>
+                      <a:r>
+                        <a:rPr sz="800">
+                          <a:solidFill>
+                            <a:srgbClr val="1A202C"/>
+                          </a:solidFill>
+                        </a:rPr>
+                        <a:t>178 MB；冷 2.2 s、热 0.6 s</a:t>
+                      </a:r>
+                    </a:p>
+                  </a:txBody>
+                  <a:tcPr>
+                    <a:solidFill>
+                      <a:srgbClr val="F4F7FC"/>
+                    </a:solidFill>
+                  </a:tcPr>
+                </a:tc>
+                <a:tc>
+                  <a:txBody>
+                    <a:bodyPr wrap="square"/>
+                    <a:lstStyle/>
+                    <a:p>
+                      <a:r>
+                        <a:rPr sz="800">
+                          <a:solidFill>
+                            <a:srgbClr val="1A202C"/>
+                          </a:solidFill>
+                        </a:rPr>
+                        <a:t>本机 Docker 29.9.2（9/9 项）</a:t>
+                      </a:r>
+                    </a:p>
+                  </a:txBody>
+                  <a:tcPr>
+                    <a:solidFill>
+                      <a:srgbClr val="F4F7FC"/>
+                    </a:solidFill>
+                  </a:tcPr>
+                </a:tc>
+              </a:tr>
+              <a:tr h="280851">
+                <a:tc>
+                  <a:txBody>
+                    <a:bodyPr wrap="square"/>
+                    <a:lstStyle/>
+                    <a:p>
+                      <a:r>
+                        <a:rPr sz="800">
+                          <a:solidFill>
+                            <a:srgbClr val="1A202C"/>
+                          </a:solidFill>
+                        </a:rPr>
+                        <a:t>容器启动到 /healthz 200</a:t>
+                      </a:r>
+                    </a:p>
+                  </a:txBody>
+                  <a:tcPr>
+                    <a:solidFill>
+                      <a:srgbClr val="FFFFFF"/>
+                    </a:solidFill>
+                  </a:tcPr>
+                </a:tc>
+                <a:tc>
+                  <a:txBody>
+                    <a:bodyPr wrap="square"/>
+                    <a:lstStyle/>
+                    <a:p>
+                      <a:r>
+                        <a:rPr sz="800">
+                          <a:solidFill>
+                            <a:srgbClr val="1A202C"/>
+                          </a:solidFill>
+                        </a:rPr>
+                        <a:t>0.75–1.01 s</a:t>
+                      </a:r>
+                    </a:p>
+                  </a:txBody>
+                  <a:tcPr>
+                    <a:solidFill>
+                      <a:srgbClr val="FFFFFF"/>
+                    </a:solidFill>
+                  </a:tcPr>
+                </a:tc>
+                <a:tc>
+                  <a:txBody>
+                    <a:bodyPr wrap="square"/>
+                    <a:lstStyle/>
+                    <a:p>
+                      <a:r>
+                        <a:rPr sz="800">
+                          <a:solidFill>
+                            <a:srgbClr val="1A202C"/>
+                          </a:solidFill>
+                        </a:rPr>
+                        <a:t>同上；单机基线</a:t>
+                      </a:r>
+                    </a:p>
+                  </a:txBody>
+                  <a:tcPr>
+                    <a:solidFill>
+                      <a:srgbClr val="FFFFFF"/>
+                    </a:solidFill>
+                  </a:tcPr>
+                </a:tc>
+              </a:tr>
+              <a:tr h="280851">
+                <a:tc>
+                  <a:txBody>
+                    <a:bodyPr wrap="square"/>
+                    <a:lstStyle/>
+                    <a:p>
+                      <a:r>
+                        <a:rPr sz="800">
+                          <a:solidFill>
+                            <a:srgbClr val="1A202C"/>
+                          </a:solidFill>
+                        </a:rPr>
+                        <a:t>容器内存 / CPU</a:t>
+                      </a:r>
+                    </a:p>
+                  </a:txBody>
+                  <a:tcPr>
+                    <a:solidFill>
+                      <a:srgbClr val="F4F7FC"/>
+                    </a:solidFill>
+                  </a:tcPr>
+                </a:tc>
+                <a:tc>
+                  <a:txBody>
+                    <a:bodyPr wrap="square"/>
+                    <a:lstStyle/>
+                    <a:p>
+                      <a:r>
+                        <a:rPr sz="800">
+                          <a:solidFill>
+                            <a:srgbClr val="1A202C"/>
+                          </a:solidFill>
+                        </a:rPr>
+                        <a:t>14.41–17.86 MiB / 0.01%</a:t>
+                      </a:r>
+                    </a:p>
+                  </a:txBody>
+                  <a:tcPr>
+                    <a:solidFill>
+                      <a:srgbClr val="F4F7FC"/>
+                    </a:solidFill>
+                  </a:tcPr>
+                </a:tc>
+                <a:tc>
+                  <a:txBody>
+                    <a:bodyPr wrap="square"/>
+                    <a:lstStyle/>
+                    <a:p>
+                      <a:r>
+                        <a:rPr sz="800">
+                          <a:solidFill>
+                            <a:srgbClr val="1A202C"/>
+                          </a:solidFill>
+                        </a:rPr>
+                        <a:t>同上；单机基线 ≠ 生产容量结论</a:t>
+                      </a:r>
+                    </a:p>
+                  </a:txBody>
+                  <a:tcPr>
+                    <a:solidFill>
+                      <a:srgbClr val="F4F7FC"/>
+                    </a:solidFill>
+                  </a:tcPr>
+                </a:tc>
+              </a:tr>
+              <a:tr h="280851">
+                <a:tc>
+                  <a:txBody>
+                    <a:bodyPr wrap="square"/>
+                    <a:lstStyle/>
+                    <a:p>
+                      <a:r>
+                        <a:rPr sz="800">
+                          <a:solidFill>
+                            <a:srgbClr val="1A202C"/>
+                          </a:solidFill>
+                        </a:rPr>
+                        <a:t>DeepSeek 单位价格</a:t>
+                      </a:r>
+                    </a:p>
+                  </a:txBody>
+                  <a:tcPr>
+                    <a:solidFill>
+                      <a:srgbClr val="FFFFFF"/>
+                    </a:solidFill>
+                  </a:tcPr>
+                </a:tc>
+                <a:tc>
+                  <a:txBody>
+                    <a:bodyPr wrap="square"/>
+                    <a:lstStyle/>
+                    <a:p>
+                      <a:r>
+                        <a:rPr sz="800">
+                          <a:solidFill>
+                            <a:srgbClr val="1A202C"/>
+                          </a:solidFill>
+                        </a:rPr>
+                        <a:t>未核实</a:t>
+                      </a:r>
+                    </a:p>
+                  </a:txBody>
+                  <a:tcPr>
+                    <a:solidFill>
+                      <a:srgbClr val="FFFFFF"/>
+                    </a:solidFill>
+                  </a:tcPr>
+                </a:tc>
+                <a:tc>
+                  <a:txBody>
+                    <a:bodyPr wrap="square"/>
+                    <a:lstStyle/>
+                    <a:p>
+                      <a:r>
+                        <a:rPr sz="800">
+                          <a:solidFill>
+                            <a:srgbClr val="1A202C"/>
+                          </a:solidFill>
+                        </a:rPr>
+                        <a:t>必须来自真实账单；禁止用估算值冒充</a:t>
+                      </a:r>
+                    </a:p>
+                  </a:txBody>
+                  <a:tcPr>
+                    <a:solidFill>
+                      <a:srgbClr val="FFFFFF"/>
+                    </a:solidFill>
+                  </a:tcPr>
+                </a:tc>
+              </a:tr>
+              <a:tr h="280851">
+                <a:tc>
+                  <a:txBody>
+                    <a:bodyPr wrap="square"/>
+                    <a:lstStyle/>
+                    <a:p>
+                      <a:r>
+                        <a:rPr sz="800">
+                          <a:solidFill>
+                            <a:srgbClr val="1A202C"/>
+                          </a:solidFill>
+                        </a:rPr>
+                        <a:t>单任务金额成本</a:t>
+                      </a:r>
+                    </a:p>
+                  </a:txBody>
+                  <a:tcPr>
+                    <a:solidFill>
+                      <a:srgbClr val="F4F7FC"/>
+                    </a:solidFill>
+                  </a:tcPr>
+                </a:tc>
+                <a:tc>
+                  <a:txBody>
+                    <a:bodyPr wrap="square"/>
+                    <a:lstStyle/>
+                    <a:p>
+                      <a:r>
+                        <a:rPr sz="800">
+                          <a:solidFill>
+                            <a:srgbClr val="1A202C"/>
+                          </a:solidFill>
+                        </a:rPr>
+                        <a:t>未核实</a:t>
+                      </a:r>
+                    </a:p>
+                  </a:txBody>
+                  <a:tcPr>
+                    <a:solidFill>
+                      <a:srgbClr val="F4F7FC"/>
+                    </a:solidFill>
+                  </a:tcPr>
+                </a:tc>
+                <a:tc>
+                  <a:txBody>
+                    <a:bodyPr wrap="square"/>
+                    <a:lstStyle/>
+                    <a:p>
+                      <a:r>
+                        <a:rPr sz="800">
+                          <a:solidFill>
+                            <a:srgbClr val="1A202C"/>
+                          </a:solidFill>
+                        </a:rPr>
+                        <a:t>同上</a:t>
+                      </a:r>
+                    </a:p>
+                  </a:txBody>
+                  <a:tcPr>
+                    <a:solidFill>
+                      <a:srgbClr val="F4F7FC"/>
+                    </a:solidFill>
+                  </a:tcPr>
+                </a:tc>
+              </a:tr>
+              <a:tr h="280857">
+                <a:tc>
+                  <a:txBody>
+                    <a:bodyPr wrap="square"/>
+                    <a:lstStyle/>
+                    <a:p>
+                      <a:r>
+                        <a:rPr sz="800">
+                          <a:solidFill>
+                            <a:srgbClr val="1A202C"/>
+                          </a:solidFill>
+                        </a:rPr>
+                        <a:t>云端资源消耗 / 跨机延迟</a:t>
+                      </a:r>
+                    </a:p>
+                  </a:txBody>
+                  <a:tcPr>
+                    <a:solidFill>
+                      <a:srgbClr val="FFFFFF"/>
+                    </a:solidFill>
+                  </a:tcPr>
+                </a:tc>
+                <a:tc>
+                  <a:txBody>
+                    <a:bodyPr wrap="square"/>
+                    <a:lstStyle/>
+                    <a:p>
+                      <a:r>
+                        <a:rPr sz="800">
+                          <a:solidFill>
+                            <a:srgbClr val="1A202C"/>
+                          </a:solidFill>
+                        </a:rPr>
+                        <a:t>未测量</a:t>
+                      </a:r>
+                    </a:p>
+                  </a:txBody>
+                  <a:tcPr>
+                    <a:solidFill>
+                      <a:srgbClr val="FFFFFF"/>
+                    </a:solidFill>
+                  </a:tcPr>
+                </a:tc>
+                <a:tc>
+                  <a:txBody>
+                    <a:bodyPr wrap="square"/>
+                    <a:lstStyle/>
+                    <a:p>
+                      <a:r>
+                        <a:rPr sz="800">
+                          <a:solidFill>
+                            <a:srgbClr val="1A202C"/>
+                          </a:solidFill>
+                        </a:rPr>
+                        <a:t>未上云，无跨机样本</a:t>
+                      </a:r>
+                    </a:p>
+                  </a:txBody>
+                  <a:tcPr>
+                    <a:solidFill>
+                      <a:srgbClr val="FFFFFF"/>
                     </a:solidFill>
                   </a:tcPr>
                 </a:tc>
@@ -8623,8 +9640,8 @@
         </p:nvSpPr>
         <p:spPr>
           <a:xfrm>
-            <a:off x="6537960" y="1325880"/>
-            <a:ext cx="5166360" cy="3200400"/>
+            <a:off x="7955279" y="1225296"/>
+            <a:ext cx="3749039" cy="3931920"/>
           </a:xfrm>
           <a:prstGeom prst="rect">
             <a:avLst/>
@@ -8653,7 +9670,7 @@
           </a:fontRef>
         </p:style>
         <p:txBody>
-          <a:bodyPr rtlCol="0" anchor="ctr" wrap="square" lIns="109728" tIns="73152"/>
+          <a:bodyPr rtlCol="0" anchor="ctr" wrap="square" lIns="100584" rIns="82296" tIns="54864"/>
           <a:lstStyle/>
           <a:p>
             <a:pPr algn="ctr"/>
@@ -8663,32 +9680,62 @@
                   <a:srgbClr val="2563EB"/>
                 </a:solidFill>
               </a:rPr>
-              <a:t>成本结构与瓶颈（估算 ≠ 实测）</a:t>
+              <a:t>成本口径与瓶颈</a:t>
             </a:r>
           </a:p>
           <a:p>
             <a:pPr>
               <a:spcAft>
-                <a:spcPts val="300"/>
-              </a:spcAft>
-            </a:pPr>
-            <a:r>
-              <a:rPr sz="1100">
-                <a:solidFill>
-                  <a:srgbClr val="1A202C"/>
-                </a:solidFill>
-              </a:rPr>
-              <a:t>主要潜在成本 = 模型调用（平台配额 + token），其次为云主机</a:t>
+                <a:spcPts val="100"/>
+              </a:spcAft>
+            </a:pPr>
+            <a:r>
+              <a:rPr sz="900">
+                <a:solidFill>
+                  <a:srgbClr val="1A202C"/>
+                </a:solidFill>
+              </a:rPr>
+              <a:t>token 只认服务端 total_tokens，不手算、不估</a:t>
             </a:r>
           </a:p>
           <a:p>
             <a:pPr>
               <a:spcAft>
-                <a:spcPts val="300"/>
-              </a:spcAft>
-            </a:pPr>
-            <a:r>
-              <a:rPr sz="1100">
+                <a:spcPts val="100"/>
+              </a:spcAft>
+            </a:pPr>
+            <a:r>
+              <a:rPr sz="900">
+                <a:solidFill>
+                  <a:srgbClr val="1A202C"/>
+                </a:solidFill>
+              </a:rPr>
+              <a:t>单价缺失 → 记「未核实」，不填 0、不用牌价</a:t>
+            </a:r>
+          </a:p>
+          <a:p>
+            <a:pPr>
+              <a:spcAft>
+                <a:spcPts val="100"/>
+              </a:spcAft>
+            </a:pPr>
+            <a:r>
+              <a:rPr sz="900">
+                <a:solidFill>
+                  <a:srgbClr val="1A202C"/>
+                </a:solidFill>
+              </a:rPr>
+              <a:t>本机容器数据是单机基线，**不是**生产容量结论</a:t>
+            </a:r>
+          </a:p>
+          <a:p>
+            <a:pPr>
+              <a:spcAft>
+                <a:spcPts val="100"/>
+              </a:spcAft>
+            </a:pPr>
+            <a:r>
+              <a:rPr sz="900">
                 <a:solidFill>
                   <a:srgbClr val="1A202C"/>
                 </a:solidFill>
@@ -8699,11 +9746,11 @@
           <a:p>
             <a:pPr>
               <a:spcAft>
-                <a:spcPts val="300"/>
-              </a:spcAft>
-            </a:pPr>
-            <a:r>
-              <a:rPr sz="1100">
+                <a:spcPts val="100"/>
+              </a:spcAft>
+            </a:pPr>
+            <a:r>
+              <a:rPr sz="900">
                 <a:solidFill>
                   <a:srgbClr val="1A202C"/>
                 </a:solidFill>
@@ -8714,31 +9761,31 @@
           <a:p>
             <a:pPr>
               <a:spcAft>
-                <a:spcPts val="300"/>
-              </a:spcAft>
-            </a:pPr>
-            <a:r>
-              <a:rPr sz="1100">
-                <a:solidFill>
-                  <a:srgbClr val="1A202C"/>
-                </a:solidFill>
-              </a:rPr>
-              <a:t>省钱设计：全局最多一次修订，避免重试放大成本</a:t>
+                <a:spcPts val="100"/>
+              </a:spcAft>
+            </a:pPr>
+            <a:r>
+              <a:rPr sz="900">
+                <a:solidFill>
+                  <a:srgbClr val="1A202C"/>
+                </a:solidFill>
+              </a:rPr>
+              <a:t>省钱设计：全局最多一次修订</a:t>
             </a:r>
           </a:p>
           <a:p>
             <a:pPr>
               <a:spcAft>
-                <a:spcPts val="300"/>
-              </a:spcAft>
-            </a:pPr>
-            <a:r>
-              <a:rPr sz="1100">
-                <a:solidFill>
-                  <a:srgbClr val="1A202C"/>
-                </a:solidFill>
-              </a:rPr>
-              <a:t>真正的瓶颈是模型输出质量与延迟，不是规则层</a:t>
+                <a:spcPts val="100"/>
+              </a:spcAft>
+            </a:pPr>
+            <a:r>
+              <a:rPr sz="900">
+                <a:solidFill>
+                  <a:srgbClr val="1A202C"/>
+                </a:solidFill>
+              </a:rPr>
+              <a:t>瓶颈：模型生成 4.5–6.0 s 远大于规则层（毫秒级）</a:t>
             </a:r>
           </a:p>
         </p:txBody>
@@ -8751,8 +9798,8 @@
         </p:nvSpPr>
         <p:spPr>
           <a:xfrm>
-            <a:off x="502920" y="4709160"/>
-            <a:ext cx="11201400" cy="1600200"/>
+            <a:off x="502920" y="5303520"/>
+            <a:ext cx="11201400" cy="969264"/>
           </a:xfrm>
           <a:prstGeom prst="rect">
             <a:avLst/>
@@ -8781,7 +9828,7 @@
           </a:fontRef>
         </p:style>
         <p:txBody>
-          <a:bodyPr rtlCol="0" anchor="ctr" wrap="square" lIns="109728" tIns="73152"/>
+          <a:bodyPr rtlCol="0" anchor="ctr" wrap="square" lIns="100584" rIns="82296" tIns="54864"/>
           <a:lstStyle/>
           <a:p>
             <a:pPr algn="ctr"/>
@@ -8797,46 +9844,46 @@
           <a:p>
             <a:pPr>
               <a:spcAft>
-                <a:spcPts val="300"/>
-              </a:spcAft>
-            </a:pPr>
-            <a:r>
-              <a:rPr sz="1100">
-                <a:solidFill>
-                  <a:srgbClr val="1A202C"/>
-                </a:solidFill>
-              </a:rPr>
-              <a:t>自建编排 vs Dify → 用 Dify：省工程量，代价是平台耦合与沙箱限制</a:t>
+                <a:spcPts val="100"/>
+              </a:spcAft>
+            </a:pPr>
+            <a:r>
+              <a:rPr sz="900">
+                <a:solidFill>
+                  <a:srgbClr val="1A202C"/>
+                </a:solidFill>
+              </a:rPr>
+              <a:t>自建编排 vs Dify → 用 Dify：省工程量；代价是平台耦合、ELSE 分支无运行证据、trace 不可用</a:t>
             </a:r>
           </a:p>
           <a:p>
             <a:pPr>
               <a:spcAft>
-                <a:spcPts val="300"/>
-              </a:spcAft>
-            </a:pPr>
-            <a:r>
-              <a:rPr sz="1100">
-                <a:solidFill>
-                  <a:srgbClr val="1A202C"/>
-                </a:solidFill>
-              </a:rPr>
-              <a:t>微服务 / K8s vs 单体容器 → 暂不引入：无伸缩需求证据；赛题是否强制容器或 K8s 仍待核实</a:t>
+                <a:spcPts val="100"/>
+              </a:spcAft>
+            </a:pPr>
+            <a:r>
+              <a:rPr sz="900">
+                <a:solidFill>
+                  <a:srgbClr val="1A202C"/>
+                </a:solidFill>
+              </a:rPr>
+              <a:t>K8s / 微服务 vs 单机容器 → 暂不引入：云部署从未发生，无编排、无多副本、无弹性伸缩、无资源调度、无分布式状态</a:t>
             </a:r>
           </a:p>
           <a:p>
             <a:pPr>
               <a:spcAft>
-                <a:spcPts val="300"/>
-              </a:spcAft>
-            </a:pPr>
-            <a:r>
-              <a:rPr sz="1100">
-                <a:solidFill>
-                  <a:srgbClr val="1A202C"/>
-                </a:solidFill>
-              </a:rPr>
-              <a:t>实时商品数据 vs 估算 → 明确标注为估算：没有真实数据源，不虚构价格 / 库存 / 物流</a:t>
+                <a:spcPts val="100"/>
+              </a:spcAft>
+            </a:pPr>
+            <a:r>
+              <a:rPr sz="900">
+                <a:solidFill>
+                  <a:srgbClr val="1A202C"/>
+                </a:solidFill>
+              </a:rPr>
+              <a:t>实时商品数据 vs 估算 → 明确标注未核实：价格与库存未核实，business_data_verification = not_verified（OPEN-6 仍开放）</a:t>
             </a:r>
           </a:p>
         </p:txBody>
@@ -8849,8 +9896,8 @@
         </p:nvSpPr>
         <p:spPr>
           <a:xfrm>
-            <a:off x="502920" y="6419088"/>
-            <a:ext cx="11155680" cy="310896"/>
+            <a:off x="502920" y="6364224"/>
+            <a:ext cx="11201400" cy="420624"/>
           </a:xfrm>
           <a:prstGeom prst="rect">
             <a:avLst/>
@@ -8864,12 +9911,12 @@
           <a:lstStyle/>
           <a:p>
             <a:r>
-              <a:rPr sz="1000">
-                <a:solidFill>
-                  <a:srgbClr val="606B7C"/>
-                </a:solidFill>
-              </a:rPr>
-              <a:t>成本与性能按阶段记录调用次数、耗时、用量与费率依据；探针耗时不可当作业务延迟。</a:t>
+              <a:rPr sz="950">
+                <a:solidFill>
+                  <a:srgbClr val="B42828"/>
+                </a:solidFill>
+              </a:rPr>
+              <a:t>单位价格必须由用户从真实账单提供；未提供前，本页所有金额类结论一律写「未核实」。</a:t>
             </a:r>
           </a:p>
         </p:txBody>
@@ -8943,8 +9990,8 @@
         </p:nvSpPr>
         <p:spPr>
           <a:xfrm>
-            <a:off x="502920" y="274320"/>
-            <a:ext cx="11155680" cy="658368"/>
+            <a:off x="502920" y="219456"/>
+            <a:ext cx="11201400" cy="603504"/>
           </a:xfrm>
           <a:prstGeom prst="rect">
             <a:avLst/>
@@ -8958,12 +10005,12 @@
           <a:lstStyle/>
           <a:p>
             <a:r>
-              <a:rPr sz="2500" b="1">
-                <a:solidFill>
-                  <a:srgbClr val="1A202C"/>
-                </a:solidFill>
-              </a:rPr>
-              <a:t>⑧ 总结与不足</a:t>
+              <a:rPr sz="2400" b="1">
+                <a:solidFill>
+                  <a:srgbClr val="1A202C"/>
+                </a:solidFill>
+              </a:rPr>
+              <a:t>⑧ 总结与不足：已实测（A 组 7 条） / 明确未完成（B 组 17 条，不得美化）</a:t>
             </a:r>
           </a:p>
         </p:txBody>
@@ -8976,8 +10023,8 @@
         </p:nvSpPr>
         <p:spPr>
           <a:xfrm>
-            <a:off x="521207" y="896112"/>
-            <a:ext cx="11155680" cy="329184"/>
+            <a:off x="521207" y="822960"/>
+            <a:ext cx="11201400" cy="365760"/>
           </a:xfrm>
           <a:prstGeom prst="rect">
             <a:avLst/>
@@ -8991,12 +10038,12 @@
           <a:lstStyle/>
           <a:p>
             <a:r>
-              <a:rPr sz="1300">
+              <a:rPr sz="1200">
                 <a:solidFill>
                   <a:srgbClr val="606B7C"/>
                 </a:solidFill>
               </a:rPr>
-              <a:t>已完成（E）｜未解决（P）｜下一步计划</a:t>
+              <a:t>口径纪律：可写「在本机真实构建并验证」；不得写成「已上云 / 已用 K8S / 已弹性伸缩 / 已推镜像仓库」</a:t>
             </a:r>
           </a:p>
         </p:txBody>
@@ -9009,8 +10056,8 @@
         </p:nvSpPr>
         <p:spPr>
           <a:xfrm>
-            <a:off x="502920" y="1325880"/>
-            <a:ext cx="3611880" cy="4800600"/>
+            <a:off x="502920" y="1243584"/>
+            <a:ext cx="4754880" cy="4992624"/>
           </a:xfrm>
           <a:prstGeom prst="rect">
             <a:avLst/>
@@ -9039,122 +10086,122 @@
           </a:fontRef>
         </p:style>
         <p:txBody>
-          <a:bodyPr rtlCol="0" anchor="ctr" wrap="square" lIns="109728" tIns="73152"/>
+          <a:bodyPr rtlCol="0" anchor="ctr" wrap="square" rIns="73152" bIns="27432"/>
           <a:lstStyle/>
           <a:p>
             <a:pPr algn="ctr"/>
             <a:r>
-              <a:rPr sz="1400" b="1">
+              <a:rPr sz="1250" b="1">
                 <a:solidFill>
                   <a:srgbClr val="0E7C4F"/>
                 </a:solidFill>
               </a:rPr>
-              <a:t>已完成（E）</a:t>
+              <a:t>A. 可以作为「已实测」列出的（有原始证据，可复核）· 7 条</a:t>
             </a:r>
           </a:p>
           <a:p>
             <a:pPr>
               <a:spcAft>
-                <a:spcPts val="300"/>
-              </a:spcAft>
-            </a:pPr>
-            <a:r>
-              <a:rPr sz="1050">
-                <a:solidFill>
-                  <a:srgbClr val="1A202C"/>
-                </a:solidFill>
-              </a:rPr>
-              <a:t>需求与契约冻结（阶段 1）</a:t>
+                <a:spcPts val="100"/>
+              </a:spcAft>
+            </a:pPr>
+            <a:r>
+              <a:rPr sz="950">
+                <a:solidFill>
+                  <a:srgbClr val="1A202C"/>
+                </a:solidFill>
+              </a:rPr>
+              <a:t>A1 本机探针 46 条通过；单元测试 322 条通过。</a:t>
             </a:r>
           </a:p>
           <a:p>
             <a:pPr>
               <a:spcAft>
-                <a:spcPts val="300"/>
-              </a:spcAft>
-            </a:pPr>
-            <a:r>
-              <a:rPr sz="1050">
-                <a:solidFill>
-                  <a:srgbClr val="1A202C"/>
-                </a:solidFill>
-              </a:rPr>
-              <a:t>关系枚举含独立 pursuit（追求对象）与 partner（恋人）</a:t>
+                <a:spcPts val="100"/>
+              </a:spcAft>
+            </a:pPr>
+            <a:r>
+              <a:rPr sz="950">
+                <a:solidFill>
+                  <a:srgbClr val="1A202C"/>
+                </a:solidFill>
+              </a:rPr>
+              <a:t>A2 Dify 工作流真实运行 10 次模型调用 / 34,127 tokens；N2 节点约 6.0 s；工作流服务端 0.587–0.888 s；代码节点 0.067–0.238 s。</a:t>
             </a:r>
           </a:p>
           <a:p>
             <a:pPr>
               <a:spcAft>
-                <a:spcPts val="300"/>
-              </a:spcAft>
-            </a:pPr>
-            <a:r>
-              <a:rPr sz="1050">
-                <a:solidFill>
-                  <a:srgbClr val="1A202C"/>
-                </a:solidFill>
-              </a:rPr>
-              <a:t>确定性校验器 + 三层测试真实通过（46 / 322 / 39）</a:t>
+                <a:spcPts val="100"/>
+              </a:spcAft>
+            </a:pPr>
+            <a:r>
+              <a:rPr sz="950">
+                <a:solidFill>
+                  <a:srgbClr val="1A202C"/>
+                </a:solidFill>
+              </a:rPr>
+              <a:t>A3 容器化：镜像 giftwise-validator 178 MB；冷构建 2.2 s、热构建 0.6 s；启动到 /healthz 200 用 0.75–1.01 s；容器内存 14.41–17.86 MiB、CPU 0.01%。</a:t>
             </a:r>
           </a:p>
           <a:p>
             <a:pPr>
               <a:spcAft>
-                <a:spcPts val="300"/>
-              </a:spcAft>
-            </a:pPr>
-            <a:r>
-              <a:rPr sz="1050">
-                <a:solidFill>
-                  <a:srgbClr val="1A202C"/>
-                </a:solidFill>
-              </a:rPr>
-              <a:t>真实 Dify 沙箱 Code 节点成功（0 Tokens），验证「规则可上云沙箱」这一前置假设</a:t>
+                <a:spcPts val="100"/>
+              </a:spcAft>
+            </a:pPr>
+            <a:r>
+              <a:rPr sz="950">
+                <a:solidFill>
+                  <a:srgbClr val="1A202C"/>
+                </a:solidFill>
+              </a:rPr>
+              <a:t>A4 容器 POST /validate 与本机 validator.rules.validate 逐字节一致；/healthz 的规则哈希与本机 rules.py 一致。</a:t>
             </a:r>
           </a:p>
           <a:p>
             <a:pPr>
               <a:spcAft>
-                <a:spcPts val="300"/>
-              </a:spcAft>
-            </a:pPr>
-            <a:r>
-              <a:rPr sz="1050">
-                <a:solidFill>
-                  <a:srgbClr val="1A202C"/>
-                </a:solidFill>
-              </a:rPr>
-              <a:t>本地校验 API 可运行</a:t>
+                <a:spcPts val="100"/>
+              </a:spcAft>
+            </a:pPr>
+            <a:r>
+              <a:rPr sz="950">
+                <a:solidFill>
+                  <a:srgbClr val="1A202C"/>
+                </a:solidFill>
+              </a:rPr>
+              <a:t>A5 镜像内无密钥、无 .git/tests/docs/workflow；以非 root（uid 10001）运行。</a:t>
             </a:r>
           </a:p>
           <a:p>
             <a:pPr>
               <a:spcAft>
-                <a:spcPts val="300"/>
-              </a:spcAft>
-            </a:pPr>
-            <a:r>
-              <a:rPr sz="1050">
-                <a:solidFill>
-                  <a:srgbClr val="1A202C"/>
-                </a:solidFill>
-              </a:rPr>
-              <a:t>中文接入层以明确标注的模拟数据可演示完整交互链路</a:t>
+                <a:spcPts val="100"/>
+              </a:spcAft>
+            </a:pPr>
+            <a:r>
+              <a:rPr sz="950">
+                <a:solidFill>
+                  <a:srgbClr val="1A202C"/>
+                </a:solidFill>
+              </a:rPr>
+              <a:t>A6 接入层 JS 与 Python 规则语义一致（55 组样例 / 0 差异）；HTTP 冒烟 59 项 / 0 失败。</a:t>
             </a:r>
           </a:p>
           <a:p>
             <a:pPr>
               <a:spcAft>
-                <a:spcPts val="300"/>
-              </a:spcAft>
-            </a:pPr>
-            <a:r>
-              <a:rPr sz="1050">
-                <a:solidFill>
-                  <a:srgbClr val="1A202C"/>
-                </a:solidFill>
-              </a:rPr>
-              <a:t>失败路径不伪装为完成；生成物哈希可追溯</a:t>
+                <a:spcPts val="100"/>
+              </a:spcAft>
+            </a:pPr>
+            <a:r>
+              <a:rPr sz="950">
+                <a:solidFill>
+                  <a:srgbClr val="1A202C"/>
+                </a:solidFill>
+              </a:rPr>
+              <a:t>A7 本机运行 deploy/server.py：状态码矩阵、/validate 与进程内调用逐字节一致。</a:t>
             </a:r>
           </a:p>
         </p:txBody>
@@ -9167,8 +10214,8 @@
         </p:nvSpPr>
         <p:spPr>
           <a:xfrm>
-            <a:off x="4279392" y="1325880"/>
-            <a:ext cx="3611880" cy="4800600"/>
+            <a:off x="5440680" y="1243584"/>
+            <a:ext cx="6263640" cy="4992624"/>
           </a:xfrm>
           <a:prstGeom prst="rect">
             <a:avLst/>
@@ -9197,234 +10244,358 @@
           </a:fontRef>
         </p:style>
         <p:txBody>
-          <a:bodyPr rtlCol="0" anchor="ctr" wrap="square" lIns="109728" tIns="73152"/>
+          <a:bodyPr rtlCol="0" anchor="ctr" wrap="square" rIns="73152" bIns="27432"/>
           <a:lstStyle/>
           <a:p>
             <a:pPr algn="ctr"/>
             <a:r>
-              <a:rPr sz="1400" b="1">
+              <a:rPr sz="1150" b="1">
                 <a:solidFill>
                   <a:srgbClr val="B42828"/>
                 </a:solidFill>
               </a:rPr>
-              <a:t>未解决（P，按优先级）</a:t>
+              <a:t>B. 必须写进「明确未完成」的（不得美化、不得省略）· 17 条</a:t>
             </a:r>
           </a:p>
           <a:p>
             <a:pPr>
-              <a:spcAft>
+              <a:spcBef>
                 <a:spcPts val="300"/>
-              </a:spcAft>
-            </a:pPr>
-            <a:r>
-              <a:rPr sz="1050">
-                <a:solidFill>
-                  <a:srgbClr val="1A202C"/>
-                </a:solidFill>
-              </a:rPr>
-              <a:t>1 模型授权（OPEN-5）：阻塞真实三候选、真实修订、成本与延迟 —— 最高优先</a:t>
+              </a:spcBef>
+              <a:spcAft>
+                <a:spcPts val="100"/>
+              </a:spcAft>
+            </a:pPr>
+            <a:r>
+              <a:rPr sz="900" b="1">
+                <a:solidFill>
+                  <a:srgbClr val="B42828"/>
+                </a:solidFill>
+              </a:rPr>
+              <a:t>B1 云与编排（对应「云原生 15 分」）</a:t>
             </a:r>
           </a:p>
           <a:p>
             <a:pPr>
               <a:spcAft>
+                <a:spcPts val="100"/>
+              </a:spcAft>
+            </a:pPr>
+            <a:r>
+              <a:rPr sz="800">
+                <a:solidFill>
+                  <a:srgbClr val="1A202C"/>
+                </a:solidFill>
+              </a:rPr>
+              <a:t>1. 云部署从未发生：没有云主机、没有 EIP、UCloud 未采购（按边界不得自行开支）。</a:t>
+            </a:r>
+          </a:p>
+          <a:p>
+            <a:pPr>
+              <a:spcAft>
+                <a:spcPts val="100"/>
+              </a:spcAft>
+            </a:pPr>
+            <a:r>
+              <a:rPr sz="800">
+                <a:solidFill>
+                  <a:srgbClr val="1A202C"/>
+                </a:solidFill>
+              </a:rPr>
+              <a:t>2. publish-to-uhost.ps1 从未上传过任何主机（仅做过参数拼装与 -DryRun 静态校验）。</a:t>
+            </a:r>
+          </a:p>
+          <a:p>
+            <a:pPr>
+              <a:spcAft>
+                <a:spcPts val="100"/>
+              </a:spcAft>
+            </a:pPr>
+            <a:r>
+              <a:rPr sz="800">
+                <a:solidFill>
+                  <a:srgbClr val="1A202C"/>
+                </a:solidFill>
+              </a:rPr>
+              <a:t>3. 未推送任何镜像仓库（镜像只存在于本机 Docker）。</a:t>
+            </a:r>
+          </a:p>
+          <a:p>
+            <a:pPr>
+              <a:spcAft>
+                <a:spcPts val="100"/>
+              </a:spcAft>
+            </a:pPr>
+            <a:r>
+              <a:rPr sz="800">
+                <a:solidFill>
+                  <a:srgbClr val="1A202C"/>
+                </a:solidFill>
+              </a:rPr>
+              <a:t>4. 无编排平台（无 K8S/k3s）、无多副本、无弹性伸缩、无资源调度、无分布式状态。</a:t>
+            </a:r>
+          </a:p>
+          <a:p>
+            <a:pPr>
+              <a:spcBef>
                 <a:spcPts val="300"/>
-              </a:spcAft>
-            </a:pPr>
-            <a:r>
-              <a:rPr sz="1050">
-                <a:solidFill>
-                  <a:srgbClr val="1A202C"/>
-                </a:solidFill>
-              </a:rPr>
-              <a:t>2 N1–N7 接线与草稿发布：现仅 2 节点 1 边、无结束节点</a:t>
+              </a:spcBef>
+              <a:spcAft>
+                <a:spcPts val="100"/>
+              </a:spcAft>
+            </a:pPr>
+            <a:r>
+              <a:rPr sz="900" b="1">
+                <a:solidFill>
+                  <a:srgbClr val="B42828"/>
+                </a:solidFill>
+              </a:rPr>
+              <a:t>B2 Dify 工作流</a:t>
             </a:r>
           </a:p>
           <a:p>
             <a:pPr>
               <a:spcAft>
+                <a:spcPts val="100"/>
+              </a:spcAft>
+            </a:pPr>
+            <a:r>
+              <a:rPr sz="800">
+                <a:solidFill>
+                  <a:srgbClr val="1A202C"/>
+                </a:solidFill>
+              </a:rPr>
+              <a:t>5. 工作流未发布、未创建版本（当前是草稿状态）。</a:t>
+            </a:r>
+          </a:p>
+          <a:p>
+            <a:pPr>
+              <a:spcAft>
+                <a:spcPts val="100"/>
+              </a:spcAft>
+            </a:pPr>
+            <a:r>
+              <a:rPr sz="800">
+                <a:solidFill>
+                  <a:srgbClr val="1A202C"/>
+                </a:solidFill>
+              </a:rPr>
+              <a:t>6. 平台级 trace 不可用：trace-runs 返回 not_collected（该租户未开启 tracing），节点级输出只能从界面「上次运行」获取，没有平台侧调用链。</a:t>
+            </a:r>
+          </a:p>
+          <a:p>
+            <a:pPr>
+              <a:spcAft>
+                <a:spcPts val="100"/>
+              </a:spcAft>
+            </a:pPr>
+            <a:r>
+              <a:rPr sz="800">
+                <a:solidFill>
+                  <a:srgbClr val="1A202C"/>
+                </a:solidFill>
+              </a:rPr>
+              <a:t>7. N4 的 ELSE 分支从未被触发过。</a:t>
+            </a:r>
+          </a:p>
+          <a:p>
+            <a:pPr>
+              <a:spcAft>
+                <a:spcPts val="100"/>
+              </a:spcAft>
+            </a:pPr>
+            <a:r>
+              <a:rPr sz="800">
+                <a:solidFill>
+                  <a:srgbClr val="1A202C"/>
+                </a:solidFill>
+              </a:rPr>
+              <a:t>8. 没有自然触发的 OVER_BUDGET 证据（首次校验错误均为 FORBIDDEN_TERM）；没有 FORBIDDEN_TAG 触发证据。</a:t>
+            </a:r>
+          </a:p>
+          <a:p>
+            <a:pPr>
+              <a:spcAft>
+                <a:spcPts val="100"/>
+              </a:spcAft>
+            </a:pPr>
+            <a:r>
+              <a:rPr sz="800">
+                <a:solidFill>
+                  <a:srgbClr val="1A202C"/>
+                </a:solidFill>
+              </a:rPr>
+              <a:t>9. 提示词修复之后的修复路径（真实修订→再校验）没有运行时证据。</a:t>
+            </a:r>
+          </a:p>
+          <a:p>
+            <a:pPr>
+              <a:spcAft>
+                <a:spcPts val="100"/>
+              </a:spcAft>
+            </a:pPr>
+            <a:r>
+              <a:rPr sz="800">
+                <a:solidFill>
+                  <a:srgbClr val="1A202C"/>
+                </a:solidFill>
+              </a:rPr>
+              <a:t>10. Dify 侧未实现包装/配色/贺卡/赠送阶段（该部分目前只在 web/ 的 mock 中呈现）。</a:t>
+            </a:r>
+          </a:p>
+          <a:p>
+            <a:pPr>
+              <a:spcBef>
                 <a:spcPts val="300"/>
-              </a:spcAft>
-            </a:pPr>
-            <a:r>
-              <a:rPr sz="1050">
-                <a:solidFill>
-                  <a:srgbClr val="1A202C"/>
-                </a:solidFill>
-              </a:rPr>
-              <a:t>3 前端交付与验收（WEB-001）：现为在飞工作 + 模拟数据</a:t>
+              </a:spcBef>
+              <a:spcAft>
+                <a:spcPts val="100"/>
+              </a:spcAft>
+            </a:pPr>
+            <a:r>
+              <a:rPr sz="900" b="1">
+                <a:solidFill>
+                  <a:srgbClr val="B42828"/>
+                </a:solidFill>
+              </a:rPr>
+              <a:t>B3 数据与成本</a:t>
             </a:r>
           </a:p>
           <a:p>
             <a:pPr>
               <a:spcAft>
+                <a:spcPts val="100"/>
+              </a:spcAft>
+            </a:pPr>
+            <a:r>
+              <a:rPr sz="800">
+                <a:solidFill>
+                  <a:srgbClr val="1A202C"/>
+                </a:solidFill>
+              </a:rPr>
+              <a:t>11. 价格、库存未核实：校验结果固定携带 business_data_verification: not_verified；没有真实商品数据源（OPEN-6 仍开放）。</a:t>
+            </a:r>
+          </a:p>
+          <a:p>
+            <a:pPr>
+              <a:spcAft>
+                <a:spcPts val="100"/>
+              </a:spcAft>
+            </a:pPr>
+            <a:r>
+              <a:rPr sz="800">
+                <a:solidFill>
+                  <a:srgbClr val="1A202C"/>
+                </a:solidFill>
+              </a:rPr>
+              <a:t>12. DeepSeek 单位价格未从真实账单核实 —— 需用户从账单提供；未提供前一律写「未核实」，不得用估算值冒充。</a:t>
+            </a:r>
+          </a:p>
+          <a:p>
+            <a:pPr>
+              <a:spcAft>
+                <a:spcPts val="100"/>
+              </a:spcAft>
+            </a:pPr>
+            <a:r>
+              <a:rPr sz="800">
+                <a:solidFill>
+                  <a:srgbClr val="1A202C"/>
+                </a:solidFill>
+              </a:rPr>
+              <a:t>13. 云端资源消耗、真实跨机延迟均未测量。</a:t>
+            </a:r>
+          </a:p>
+          <a:p>
+            <a:pPr>
+              <a:spcBef>
                 <a:spcPts val="300"/>
-              </a:spcAft>
-            </a:pPr>
-            <a:r>
-              <a:rPr sz="1050">
-                <a:solidFill>
-                  <a:srgbClr val="1A202C"/>
-                </a:solidFill>
-              </a:rPr>
-              <a:t>4 真实商品数据源（OPEN-6）：价格 / 库存 / 物流只能估算</a:t>
+              </a:spcBef>
+              <a:spcAft>
+                <a:spcPts val="100"/>
+              </a:spcAft>
+            </a:pPr>
+            <a:r>
+              <a:rPr sz="900" b="1">
+                <a:solidFill>
+                  <a:srgbClr val="B42828"/>
+                </a:solidFill>
+              </a:rPr>
+              <a:t>B4 可观测性与工程</a:t>
             </a:r>
           </a:p>
           <a:p>
             <a:pPr>
               <a:spcAft>
-                <a:spcPts val="300"/>
-              </a:spcAft>
-            </a:pPr>
-            <a:r>
-              <a:rPr sz="1050">
-                <a:solidFill>
-                  <a:srgbClr val="1A202C"/>
-                </a:solidFill>
-              </a:rPr>
-              <a:t>5 可观测性：trace 未启用（G-2）；异常处理说明未成文（G-3）</a:t>
+                <a:spcPts val="100"/>
+              </a:spcAft>
+            </a:pPr>
+            <a:r>
+              <a:rPr sz="800">
+                <a:solidFill>
+                  <a:srgbClr val="1A202C"/>
+                </a:solidFill>
+              </a:rPr>
+              <a:t>14. 阶段 14 采集方案仍是设计（部署线正在实现代码，尚未完成）→ 完成前不得写成「已实现」。</a:t>
             </a:r>
           </a:p>
           <a:p>
             <a:pPr>
               <a:spcAft>
-                <a:spcPts val="300"/>
-              </a:spcAft>
-            </a:pPr>
-            <a:r>
-              <a:rPr sz="1050">
-                <a:solidFill>
-                  <a:srgbClr val="1A202C"/>
-                </a:solidFill>
-              </a:rPr>
-              <a:t>6 部署归属：deploy/ 无任务单（OPEN-7）；Docker 未构建、UCloud 未部署</a:t>
-            </a:r>
-          </a:p>
-        </p:txBody>
-      </p:sp>
-      <p:sp>
-        <p:nvSpPr>
-          <p:cNvPr id="7" name="Rectangle 6"/>
-          <p:cNvSpPr/>
+                <a:spcPts val="100"/>
+              </a:spcAft>
+            </a:pPr>
+            <a:r>
+              <a:rPr sz="800">
+                <a:solidFill>
+                  <a:srgbClr val="1A202C"/>
+                </a:solidFill>
+              </a:rPr>
+              <a:t>15. 前端 web/ 无性能数据；未在真实浏览器中验证界面渲染与交互。</a:t>
+            </a:r>
+          </a:p>
+          <a:p>
+            <a:pPr>
+              <a:spcAft>
+                <a:spcPts val="100"/>
+              </a:spcAft>
+            </a:pPr>
+            <a:r>
+              <a:rPr sz="800">
+                <a:solidFill>
+                  <a:srgbClr val="1A202C"/>
+                </a:solidFill>
+              </a:rPr>
+              <a:t>16. parity 是样例级等价，不等于两者在所有输入上等价；无安全专项测试（注入/越权/限流）。</a:t>
+            </a:r>
+          </a:p>
+          <a:p>
+            <a:pPr>
+              <a:spcAft>
+                <a:spcPts val="100"/>
+              </a:spcAft>
+            </a:pPr>
+            <a:r>
+              <a:rPr sz="800">
+                <a:solidFill>
+                  <a:srgbClr val="1A202C"/>
+                </a:solidFill>
+              </a:rPr>
+              <a:t>17. 提交为临时提交，尚未经过独立评审（workflow/tools/ 等 PM 工具不入库）。</a:t>
+            </a:r>
+          </a:p>
+        </p:txBody>
+      </p:sp>
+      <p:sp>
+        <p:nvSpPr>
+          <p:cNvPr id="7" name="TextBox 6"/>
+          <p:cNvSpPr txBox="1"/>
           <p:nvPr/>
         </p:nvSpPr>
         <p:spPr>
           <a:xfrm>
-            <a:off x="8065008" y="1325880"/>
-            <a:ext cx="3611880" cy="4800600"/>
-          </a:xfrm>
-          <a:prstGeom prst="rect">
-            <a:avLst/>
-          </a:prstGeom>
-          <a:solidFill>
-            <a:srgbClr val="F2F5FA"/>
-          </a:solidFill>
-          <a:ln w="15875">
-            <a:solidFill>
-              <a:srgbClr val="2563EB"/>
-            </a:solidFill>
-          </a:ln>
-        </p:spPr>
-        <p:style>
-          <a:lnRef idx="1">
-            <a:schemeClr val="accent1"/>
-          </a:lnRef>
-          <a:fillRef idx="3">
-            <a:schemeClr val="accent1"/>
-          </a:fillRef>
-          <a:effectRef idx="2">
-            <a:schemeClr val="accent1"/>
-          </a:effectRef>
-          <a:fontRef idx="minor">
-            <a:schemeClr val="lt1"/>
-          </a:fontRef>
-        </p:style>
-        <p:txBody>
-          <a:bodyPr rtlCol="0" anchor="ctr" wrap="square" lIns="109728" tIns="73152"/>
-          <a:lstStyle/>
-          <a:p>
-            <a:pPr algn="ctr"/>
-            <a:r>
-              <a:rPr sz="1400" b="1">
-                <a:solidFill>
-                  <a:srgbClr val="2563EB"/>
-                </a:solidFill>
-              </a:rPr>
-              <a:t>下一步计划</a:t>
-            </a:r>
-          </a:p>
-          <a:p>
-            <a:pPr>
-              <a:spcAft>
-                <a:spcPts val="300"/>
-              </a:spcAft>
-            </a:pPr>
-            <a:r>
-              <a:rPr sz="1050">
-                <a:solidFill>
-                  <a:srgbClr val="1A202C"/>
-                </a:solidFill>
-              </a:rPr>
-              <a:t>T+1：完成模型供应商授权与额度确认，跑通真实三候选 + 真实一次修订</a:t>
-            </a:r>
-          </a:p>
-          <a:p>
-            <a:pPr>
-              <a:spcAft>
-                <a:spcPts val="300"/>
-              </a:spcAft>
-            </a:pPr>
-            <a:r>
-              <a:rPr sz="1050">
-                <a:solidFill>
-                  <a:srgbClr val="1A202C"/>
-                </a:solidFill>
-              </a:rPr>
-              <a:t>T+2：接线 N1–N7、补结束节点，沙箱复跑并留证据；前端交付后做 E2E 与中文状态验收</a:t>
-            </a:r>
-          </a:p>
-          <a:p>
-            <a:pPr>
-              <a:spcAft>
-                <a:spcPts val="300"/>
-              </a:spcAft>
-            </a:pPr>
-            <a:r>
-              <a:rPr sz="1050">
-                <a:solidFill>
-                  <a:srgbClr val="1A202C"/>
-                </a:solidFill>
-              </a:rPr>
-              <a:t>T+3：冻结版本快照、录制备用录屏、排练 3 分钟 Demo</a:t>
-            </a:r>
-          </a:p>
-          <a:p>
-            <a:pPr>
-              <a:spcAft>
-                <a:spcPts val="300"/>
-              </a:spcAft>
-            </a:pPr>
-            <a:r>
-              <a:rPr sz="1050">
-                <a:solidFill>
-                  <a:srgbClr val="1A202C"/>
-                </a:solidFill>
-              </a:rPr>
-              <a:t>T+3：确认赛题是否强制容器 / K8s 后再决定部署方案</a:t>
-            </a:r>
-          </a:p>
-        </p:txBody>
-      </p:sp>
-      <p:sp>
-        <p:nvSpPr>
-          <p:cNvPr id="8" name="TextBox 7"/>
-          <p:cNvSpPr txBox="1"/>
-          <p:nvPr/>
-        </p:nvSpPr>
-        <p:spPr>
-          <a:xfrm>
-            <a:off x="502920" y="6419088"/>
-            <a:ext cx="11155680" cy="310896"/>
+            <a:off x="502920" y="6364224"/>
+            <a:ext cx="11201400" cy="420624"/>
           </a:xfrm>
           <a:prstGeom prst="rect">
             <a:avLst/>
@@ -9438,12 +10609,12 @@
           <a:lstStyle/>
           <a:p>
             <a:r>
-              <a:rPr sz="1000">
-                <a:solidFill>
-                  <a:srgbClr val="606B7C"/>
-                </a:solidFill>
-              </a:rPr>
-              <a:t>截止 2026-11-01 10:30（北京时间）｜现场以真实运行为主，录屏仅作备用/佐证｜现场若使用与提交版本不同的代码/模型/配置，将主动说明</a:t>
+              <a:rPr sz="950">
+                <a:solidFill>
+                  <a:srgbClr val="B42828"/>
+                </a:solidFill>
+              </a:rPr>
+              <a:t>被问「能不能上云」标准回答：能部署、已写好部署脚本与设计，但按比赛边界未采购、未上传（指向 deploy/preprod-plan.md 路线 C 与本页 B1）。</a:t>
             </a:r>
           </a:p>
         </p:txBody>
